--- a/docs/Selective-Observation-Final-v3  -  Repaired.pptx
+++ b/docs/Selective-Observation-Final-v3  -  Repaired.pptx
@@ -1729,46 +1729,6 @@
       </p:grpSpPr>
       <p:sp>
         <p:nvSpPr>
-          <p:cNvPr id="27" name="Rectangle 26">
-            <a:extLst>
-              <a:ext uri="{FF2B5EF4-FFF2-40B4-BE49-F238E27FC236}">
-                <a16:creationId xmlns:a16="http://schemas.microsoft.com/office/drawing/2014/main" id="{B05FFC7E-0D20-425E-A870-DD6AA0C90796}"/>
-              </a:ext>
-            </a:extLst>
-          </p:cNvPr>
-          <p:cNvSpPr>
-            <a:spLocks noGrp="1"/>
-          </p:cNvSpPr>
-          <p:nvPr/>
-        </p:nvSpPr>
-        <p:spPr>
-          <a:xfrm>
-            <a:off x="0" y="0"/>
-            <a:ext cx="12192000" cy="6858000"/>
-          </a:xfrm>
-          <a:prstGeom prst="rect">
-            <a:avLst/>
-          </a:prstGeom>
-          <a:solidFill>
-            <a:srgbClr val="FFFFFF"/>
-          </a:solidFill>
-          <a:ln w="0">
-            <a:solidFill>
-              <a:srgbClr val="FFFFFF"/>
-            </a:solidFill>
-            <a:prstDash val="solid"/>
-          </a:ln>
-        </p:spPr>
-        <p:txBody>
-          <a:bodyPr/>
-          <a:lstStyle/>
-          <a:p>
-            <a:endParaRPr lang="en-US"/>
-          </a:p>
-        </p:txBody>
-      </p:sp>
-      <p:sp>
-        <p:nvSpPr>
           <p:cNvPr id="2" name="Rectangle 1">
             <a:extLst>
               <a:ext uri="{FF2B5EF4-FFF2-40B4-BE49-F238E27FC236}">
@@ -2114,7 +2074,7 @@
               </a:defRPr>
             </a:pPr>
             <a:r>
-              <a:rPr sz="2850" b="1">
+              <a:rPr sz="2850" b="1" dirty="0">
                 <a:solidFill>
                   <a:srgbClr val="102A43"/>
                 </a:solidFill>
@@ -2143,7 +2103,7 @@
         </p:nvSpPr>
         <p:spPr>
           <a:xfrm>
-            <a:off x="590550" y="2132492"/>
+            <a:off x="590550" y="5782541"/>
             <a:ext cx="5143500" cy="209550"/>
           </a:xfrm>
           <a:prstGeom prst="rect">
@@ -2229,7 +2189,7 @@
         </p:nvSpPr>
         <p:spPr>
           <a:xfrm>
-            <a:off x="590550" y="2590800"/>
+            <a:off x="590550" y="2057400"/>
             <a:ext cx="2095500" cy="190500"/>
           </a:xfrm>
           <a:prstGeom prst="rect">
@@ -2293,7 +2253,7 @@
         </p:nvSpPr>
         <p:spPr>
           <a:xfrm>
-            <a:off x="590550" y="2857500"/>
+            <a:off x="590550" y="2324100"/>
             <a:ext cx="6858000" cy="609600"/>
           </a:xfrm>
           <a:prstGeom prst="rect">
@@ -2357,7 +2317,7 @@
         </p:nvSpPr>
         <p:spPr>
           <a:xfrm>
-            <a:off x="590550" y="3981450"/>
+            <a:off x="590550" y="3448050"/>
             <a:ext cx="2209800" cy="1028700"/>
           </a:xfrm>
           <a:prstGeom prst="roundRect">
@@ -2399,7 +2359,7 @@
         </p:nvSpPr>
         <p:spPr>
           <a:xfrm>
-            <a:off x="590550" y="3981450"/>
+            <a:off x="590550" y="3448050"/>
             <a:ext cx="2209800" cy="57150"/>
           </a:xfrm>
           <a:prstGeom prst="rect">
@@ -2439,7 +2399,7 @@
         </p:nvSpPr>
         <p:spPr>
           <a:xfrm>
-            <a:off x="762000" y="4152900"/>
+            <a:off x="762000" y="3619500"/>
             <a:ext cx="1866900" cy="361950"/>
           </a:xfrm>
           <a:prstGeom prst="rect">
@@ -2503,7 +2463,7 @@
         </p:nvSpPr>
         <p:spPr>
           <a:xfrm>
-            <a:off x="762000" y="4572000"/>
+            <a:off x="762000" y="4038600"/>
             <a:ext cx="1866900" cy="266700"/>
           </a:xfrm>
           <a:prstGeom prst="rect">
@@ -2567,7 +2527,7 @@
         </p:nvSpPr>
         <p:spPr>
           <a:xfrm>
-            <a:off x="3048000" y="3981450"/>
+            <a:off x="3048000" y="3448050"/>
             <a:ext cx="2209800" cy="1028700"/>
           </a:xfrm>
           <a:prstGeom prst="roundRect">
@@ -2609,7 +2569,7 @@
         </p:nvSpPr>
         <p:spPr>
           <a:xfrm>
-            <a:off x="3048000" y="3981450"/>
+            <a:off x="3048000" y="3448050"/>
             <a:ext cx="2209800" cy="57150"/>
           </a:xfrm>
           <a:prstGeom prst="rect">
@@ -2649,7 +2609,7 @@
         </p:nvSpPr>
         <p:spPr>
           <a:xfrm>
-            <a:off x="3219450" y="4152900"/>
+            <a:off x="3219450" y="3619500"/>
             <a:ext cx="1866900" cy="361950"/>
           </a:xfrm>
           <a:prstGeom prst="rect">
@@ -2713,7 +2673,7 @@
         </p:nvSpPr>
         <p:spPr>
           <a:xfrm>
-            <a:off x="3219450" y="4572000"/>
+            <a:off x="3219450" y="4038600"/>
             <a:ext cx="1866900" cy="266700"/>
           </a:xfrm>
           <a:prstGeom prst="rect">
@@ -2777,7 +2737,7 @@
         </p:nvSpPr>
         <p:spPr>
           <a:xfrm>
-            <a:off x="5505450" y="3981450"/>
+            <a:off x="5505450" y="3448050"/>
             <a:ext cx="2209800" cy="1028700"/>
           </a:xfrm>
           <a:prstGeom prst="roundRect">
@@ -2819,7 +2779,7 @@
         </p:nvSpPr>
         <p:spPr>
           <a:xfrm>
-            <a:off x="5505450" y="3981450"/>
+            <a:off x="5505450" y="3448050"/>
             <a:ext cx="2209800" cy="57150"/>
           </a:xfrm>
           <a:prstGeom prst="rect">
@@ -2859,7 +2819,7 @@
         </p:nvSpPr>
         <p:spPr>
           <a:xfrm>
-            <a:off x="5676900" y="4152900"/>
+            <a:off x="5676900" y="3619500"/>
             <a:ext cx="1866900" cy="361950"/>
           </a:xfrm>
           <a:prstGeom prst="rect">
@@ -2923,7 +2883,7 @@
         </p:nvSpPr>
         <p:spPr>
           <a:xfrm>
-            <a:off x="5676900" y="4572000"/>
+            <a:off x="5676900" y="4038600"/>
             <a:ext cx="1866900" cy="266700"/>
           </a:xfrm>
           <a:prstGeom prst="rect">
@@ -3029,7 +2989,7 @@
         </p:nvSpPr>
         <p:spPr>
           <a:xfrm>
-            <a:off x="8743950" y="2647950"/>
+            <a:off x="8743950" y="2564823"/>
             <a:ext cx="2000250" cy="190500"/>
           </a:xfrm>
           <a:prstGeom prst="rect">
@@ -3064,7 +3024,7 @@
               </a:defRPr>
             </a:pPr>
             <a:r>
-              <a:rPr sz="900" b="1">
+              <a:rPr sz="900" b="1" dirty="0">
                 <a:solidFill>
                   <a:srgbClr val="B8C7DA"/>
                 </a:solidFill>
@@ -3093,7 +3053,7 @@
         </p:nvSpPr>
         <p:spPr>
           <a:xfrm>
-            <a:off x="8743950" y="3009900"/>
+            <a:off x="8743950" y="2869623"/>
             <a:ext cx="2000250" cy="1562100"/>
           </a:xfrm>
           <a:prstGeom prst="rect">
@@ -3297,6 +3257,80 @@
           </a:p>
         </p:txBody>
       </p:sp>
+      <p:pic>
+        <p:nvPicPr>
+          <p:cNvPr id="28" name="Headshot Zejun Huang">
+            <a:extLst>
+              <a:ext uri="{FF2B5EF4-FFF2-40B4-BE49-F238E27FC236}">
+                <a16:creationId xmlns:a16="http://schemas.microsoft.com/office/drawing/2014/main" id="{5E6EE509-29A6-C930-7FB7-5199E532A549}"/>
+              </a:ext>
+            </a:extLst>
+          </p:cNvPr>
+          <p:cNvPicPr>
+            <a:picLocks noChangeAspect="1"/>
+          </p:cNvPicPr>
+          <p:nvPr/>
+        </p:nvPicPr>
+        <p:blipFill>
+          <a:blip r:embed="rId3"/>
+          <a:stretch>
+            <a:fillRect/>
+          </a:stretch>
+        </p:blipFill>
+        <p:spPr>
+          <a:xfrm>
+            <a:off x="625186" y="4700700"/>
+            <a:ext cx="675000" cy="900000"/>
+          </a:xfrm>
+          <a:prstGeom prst="roundRect">
+            <a:avLst>
+              <a:gd name="adj" fmla="val 7000"/>
+            </a:avLst>
+          </a:prstGeom>
+          <a:ln w="12700">
+            <a:solidFill>
+              <a:srgbClr val="FFFFFF"/>
+            </a:solidFill>
+          </a:ln>
+        </p:spPr>
+      </p:pic>
+      <p:pic>
+        <p:nvPicPr>
+          <p:cNvPr id="29" name="Headshot Dingjiang Liang">
+            <a:extLst>
+              <a:ext uri="{FF2B5EF4-FFF2-40B4-BE49-F238E27FC236}">
+                <a16:creationId xmlns:a16="http://schemas.microsoft.com/office/drawing/2014/main" id="{1BB01BF5-05E9-D685-EFE8-877C8536E8F3}"/>
+              </a:ext>
+            </a:extLst>
+          </p:cNvPr>
+          <p:cNvPicPr>
+            <a:picLocks noChangeAspect="1"/>
+          </p:cNvPicPr>
+          <p:nvPr/>
+        </p:nvPicPr>
+        <p:blipFill>
+          <a:blip r:embed="rId4"/>
+          <a:stretch>
+            <a:fillRect/>
+          </a:stretch>
+        </p:blipFill>
+        <p:spPr>
+          <a:xfrm>
+            <a:off x="1530186" y="4700700"/>
+            <a:ext cx="641969" cy="900000"/>
+          </a:xfrm>
+          <a:prstGeom prst="roundRect">
+            <a:avLst>
+              <a:gd name="adj" fmla="val 7000"/>
+            </a:avLst>
+          </a:prstGeom>
+          <a:ln w="12700">
+            <a:solidFill>
+              <a:srgbClr val="FFFFFF"/>
+            </a:solidFill>
+          </a:ln>
+        </p:spPr>
+      </p:pic>
     </p:spTree>
     <p:extLst>
       <p:ext uri="{BB962C8B-B14F-4D97-AF65-F5344CB8AC3E}">
@@ -8154,7 +8188,7 @@
         <p:spPr>
           <a:xfrm>
             <a:off x="838200" y="2845982"/>
-            <a:ext cx="876300" cy="800100"/>
+            <a:ext cx="1047750" cy="800100"/>
           </a:xfrm>
           <a:prstGeom prst="roundRect">
             <a:avLst>
@@ -8196,7 +8230,7 @@
         <p:spPr>
           <a:xfrm>
             <a:off x="895350" y="3036482"/>
-            <a:ext cx="762000" cy="209550"/>
+            <a:ext cx="876300" cy="133350"/>
           </a:xfrm>
           <a:prstGeom prst="rect">
             <a:avLst/>
@@ -8230,7 +8264,7 @@
               </a:defRPr>
             </a:pPr>
             <a:r>
-              <a:rPr sz="1350" b="1">
+              <a:rPr sz="1350" b="1" dirty="0">
                 <a:solidFill>
                   <a:srgbClr val="102A43"/>
                 </a:solidFill>
@@ -8259,7 +8293,7 @@
         </p:nvSpPr>
         <p:spPr>
           <a:xfrm>
-            <a:off x="914400" y="3322232"/>
+            <a:off x="1000125" y="3322232"/>
             <a:ext cx="723900" cy="266700"/>
           </a:xfrm>
           <a:prstGeom prst="rect">
@@ -8294,7 +8328,7 @@
               </a:defRPr>
             </a:pPr>
             <a:r>
-              <a:rPr sz="825" b="0">
+              <a:rPr sz="825" b="0" dirty="0">
                 <a:solidFill>
                   <a:srgbClr val="5B6B82"/>
                 </a:solidFill>
@@ -8323,7 +8357,7 @@
         </p:nvSpPr>
         <p:spPr>
           <a:xfrm>
-            <a:off x="1771650" y="3226982"/>
+            <a:off x="1898738" y="3226982"/>
             <a:ext cx="171450" cy="19050"/>
           </a:xfrm>
           <a:prstGeom prst="rect">
@@ -8363,8 +8397,8 @@
         </p:nvSpPr>
         <p:spPr>
           <a:xfrm>
-            <a:off x="1962150" y="2845982"/>
-            <a:ext cx="876300" cy="800100"/>
+            <a:off x="2076450" y="2845982"/>
+            <a:ext cx="933450" cy="800100"/>
           </a:xfrm>
           <a:prstGeom prst="roundRect">
             <a:avLst>
@@ -8405,7 +8439,7 @@
         </p:nvSpPr>
         <p:spPr>
           <a:xfrm>
-            <a:off x="2019300" y="3036482"/>
+            <a:off x="2133600" y="3036482"/>
             <a:ext cx="762000" cy="209550"/>
           </a:xfrm>
           <a:prstGeom prst="rect">
@@ -8469,7 +8503,7 @@
         </p:nvSpPr>
         <p:spPr>
           <a:xfrm>
-            <a:off x="2038350" y="3322232"/>
+            <a:off x="2152650" y="3322232"/>
             <a:ext cx="723900" cy="266700"/>
           </a:xfrm>
           <a:prstGeom prst="rect">
@@ -8533,7 +8567,7 @@
         </p:nvSpPr>
         <p:spPr>
           <a:xfrm>
-            <a:off x="2895600" y="3226982"/>
+            <a:off x="3022688" y="3226982"/>
             <a:ext cx="171450" cy="19050"/>
           </a:xfrm>
           <a:prstGeom prst="rect">
@@ -8573,8 +8607,8 @@
         </p:nvSpPr>
         <p:spPr>
           <a:xfrm>
-            <a:off x="3086100" y="2845982"/>
-            <a:ext cx="876300" cy="800100"/>
+            <a:off x="3200400" y="2845982"/>
+            <a:ext cx="933450" cy="800100"/>
           </a:xfrm>
           <a:prstGeom prst="roundRect">
             <a:avLst>
@@ -8615,7 +8649,7 @@
         </p:nvSpPr>
         <p:spPr>
           <a:xfrm>
-            <a:off x="3143250" y="3036482"/>
+            <a:off x="3257550" y="3036482"/>
             <a:ext cx="762000" cy="209550"/>
           </a:xfrm>
           <a:prstGeom prst="rect">
@@ -8679,7 +8713,7 @@
         </p:nvSpPr>
         <p:spPr>
           <a:xfrm>
-            <a:off x="3162300" y="3322232"/>
+            <a:off x="3276600" y="3322232"/>
             <a:ext cx="723900" cy="266700"/>
           </a:xfrm>
           <a:prstGeom prst="rect">
@@ -8743,7 +8777,7 @@
         </p:nvSpPr>
         <p:spPr>
           <a:xfrm>
-            <a:off x="4019550" y="3226982"/>
+            <a:off x="4146638" y="3226982"/>
             <a:ext cx="171450" cy="19050"/>
           </a:xfrm>
           <a:prstGeom prst="rect">
@@ -8783,8 +8817,8 @@
         </p:nvSpPr>
         <p:spPr>
           <a:xfrm>
-            <a:off x="4210050" y="2845982"/>
-            <a:ext cx="876300" cy="800100"/>
+            <a:off x="4324350" y="2845982"/>
+            <a:ext cx="990600" cy="800100"/>
           </a:xfrm>
           <a:prstGeom prst="roundRect">
             <a:avLst>
@@ -8825,8 +8859,8 @@
         </p:nvSpPr>
         <p:spPr>
           <a:xfrm>
-            <a:off x="4267200" y="3036482"/>
-            <a:ext cx="762000" cy="209550"/>
+            <a:off x="4406439" y="3036482"/>
+            <a:ext cx="819150" cy="209550"/>
           </a:xfrm>
           <a:prstGeom prst="rect">
             <a:avLst/>
@@ -8860,7 +8894,7 @@
               </a:defRPr>
             </a:pPr>
             <a:r>
-              <a:rPr sz="1350" b="1">
+              <a:rPr sz="1350" b="1" dirty="0">
                 <a:solidFill>
                   <a:srgbClr val="102A43"/>
                 </a:solidFill>
@@ -8889,7 +8923,7 @@
         </p:nvSpPr>
         <p:spPr>
           <a:xfrm>
-            <a:off x="4286250" y="3322232"/>
+            <a:off x="4457700" y="3322232"/>
             <a:ext cx="723900" cy="266700"/>
           </a:xfrm>
           <a:prstGeom prst="rect">
@@ -8924,7 +8958,7 @@
               </a:defRPr>
             </a:pPr>
             <a:r>
-              <a:rPr sz="825" b="0">
+              <a:rPr sz="825" b="0" dirty="0">
                 <a:solidFill>
                   <a:srgbClr val="5B6B82"/>
                 </a:solidFill>

--- a/docs/Selective-Observation-Final-v3  -  Repaired.pptx
+++ b/docs/Selective-Observation-Final-v3  -  Repaired.pptx
@@ -522,20 +522,108 @@
           <a:lstStyle/>
           <a:p>
             <a:r>
+              <a:rPr sz="1200" dirty="0"/>
+              <a:t>[~45s] I want to be upfront about the limitations. First, 15 tasks is still small — no multi-seed sweep yet, and external validity remains </a:t>
+            </a:r>
+            <a:r>
               <a:rPr sz="1200"/>
-              <a:t>[~45s] I want to be upfront about the limitations. First, 15 tasks is still small — no multi-seed sweep yet, and external validity remains future work. The right next step is porting to OSWorld or WebArena. Second, we label at episode level; a step-level safety metric would be more granular. Third, the verbalized confidence signal is bimodal in practice — it either fires or it does not — which limits how much the threshold sweep can tune the gate. Despite this, the local suite serves a real diagnostic purpose: it shows exactly which task families the gate handles before we scale to an expensive external benchmark.</a:t>
-            </a:r>
-          </a:p>
-          <a:p>
-            <a:r>
-              <a:rPr sz="1100">
+              <a:t>future work. </a:t>
+            </a:r>
+            <a:r>
+              <a:rPr sz="1200" dirty="0"/>
+              <a:t>Second, we label at episode level; a step-level safety metric would be more granular. Third, the verbalized confidence signal is bimodal in practice — it either fires or it does not — which limits how much the threshold sweep can tune the gate. Despite this, the local suite serves a real diagnostic purpose: it shows exactly which task families the gate handles before we scale to an expensive external benchmark.</a:t>
+            </a:r>
+          </a:p>
+          <a:p>
+            <a:r>
+              <a:rPr sz="1100" dirty="0">
                 <a:solidFill>
                   <a:srgbClr val="94A3B8"/>
                 </a:solidFill>
               </a:rPr>
               <a:t>
-【中文参考翻译】
-我想坦诚地说明局限性。首先，15 个任务仍然很少——还没有进行多种子扫描，外部有效性仍然是未来的工作。正确的下一步是移植到 OSWorld 或 WebArena。其次，我们在 episode 层面进行标注；步骤级别的安全指标会更细粒度。第三，来自语言化模型输出的置信度信号在实践中是双峰分布的——它要么触发要么不触发——这限制了阈值扫描能够调整门控的程度。尽管如此，本地套件有其真正的诊断价值：在我们扩展到昂贵的外部基准测试之前，它准确地展示了门控能处理哪些任务系列。</a:t>
+【</a:t>
+            </a:r>
+            <a:r>
+              <a:rPr sz="1100" dirty="0" err="1">
+                <a:solidFill>
+                  <a:srgbClr val="94A3B8"/>
+                </a:solidFill>
+              </a:rPr>
+              <a:t>中文参考翻译</a:t>
+            </a:r>
+            <a:r>
+              <a:rPr sz="1100" dirty="0">
+                <a:solidFill>
+                  <a:srgbClr val="94A3B8"/>
+                </a:solidFill>
+              </a:rPr>
+              <a:t>】
+我想坦诚地说明局限性。首先，15 </a:t>
+            </a:r>
+            <a:r>
+              <a:rPr sz="1100" dirty="0" err="1">
+                <a:solidFill>
+                  <a:srgbClr val="94A3B8"/>
+                </a:solidFill>
+              </a:rPr>
+              <a:t>个任务仍然很少</a:t>
+            </a:r>
+            <a:r>
+              <a:rPr sz="1100" dirty="0">
+                <a:solidFill>
+                  <a:srgbClr val="94A3B8"/>
+                </a:solidFill>
+              </a:rPr>
+              <a:t>——</a:t>
+            </a:r>
+            <a:r>
+              <a:rPr sz="1100" dirty="0" err="1">
+                <a:solidFill>
+                  <a:srgbClr val="94A3B8"/>
+                </a:solidFill>
+              </a:rPr>
+              <a:t>还没有进行多种子扫描，外部有效性仍然是未来的工作。其次，我们在</a:t>
+            </a:r>
+            <a:r>
+              <a:rPr sz="1100" dirty="0">
+                <a:solidFill>
+                  <a:srgbClr val="94A3B8"/>
+                </a:solidFill>
+              </a:rPr>
+              <a:t> episode </a:t>
+            </a:r>
+            <a:r>
+              <a:rPr sz="1100" dirty="0" err="1">
+                <a:solidFill>
+                  <a:srgbClr val="94A3B8"/>
+                </a:solidFill>
+              </a:rPr>
+              <a:t>层面进行标注；步骤级别的安全指标会更细粒度。第三，来自语言化模型输出的置信度信号在实践中是双峰分布的</a:t>
+            </a:r>
+            <a:r>
+              <a:rPr sz="1100" dirty="0">
+                <a:solidFill>
+                  <a:srgbClr val="94A3B8"/>
+                </a:solidFill>
+              </a:rPr>
+              <a:t>——</a:t>
+            </a:r>
+            <a:r>
+              <a:rPr sz="1100" dirty="0" err="1">
+                <a:solidFill>
+                  <a:srgbClr val="94A3B8"/>
+                </a:solidFill>
+              </a:rPr>
+              <a:t>它要么触发要么不触发</a:t>
+            </a:r>
+            <a:r>
+              <a:rPr sz="1100" dirty="0">
+                <a:solidFill>
+                  <a:srgbClr val="94A3B8"/>
+                </a:solidFill>
+              </a:rPr>
+              <a:t>——这限制了阈值扫描能够调整门控的程度。尽管如此，本地套件有其真正的诊断价值：在我们扩展到昂贵的外部基准测试之前，它准确地展示了门控能处理哪些任务系列。</a:t>
             </a:r>
           </a:p>
         </p:txBody>
@@ -612,20 +700,210 @@
           <a:lstStyle/>
           <a:p>
             <a:r>
-              <a:rPr sz="1200"/>
-              <a:t>[~40s] Three things to take away. First, observation scheduling is learnable — a simple logistic gate trained on cheap features can decide when another DOM read is worth paying for. Second, learned beats handrule on the success-cost frontier — our gate at threshold 0.2 hits 100% success with 41% fewer calls than always, and 33% fewer than handrule, at zero unsafe rate. Third, the hard safety floor is essential — observation before irreversible actions is non-negotiable, and the gate only optimizes above that floor. Happy to take questions.</a:t>
-            </a:r>
-          </a:p>
-          <a:p>
-            <a:r>
-              <a:rPr sz="1100">
+              <a:rPr sz="1200" dirty="0"/>
+              <a:t>[~40s] Three things to take away. First, observation scheduling is learnable — a simple logistic gate trained on cheap features can decide when another DOM read is worth paying for. Second, learned beats </a:t>
+            </a:r>
+            <a:r>
+              <a:rPr sz="1200" dirty="0" err="1"/>
+              <a:t>handrule</a:t>
+            </a:r>
+            <a:r>
+              <a:rPr sz="1200" dirty="0"/>
+              <a:t> on the success-cost frontier — our gate at threshold 0.2 hits 100% success with 41% fewer calls than always, and 33% fewer than </a:t>
+            </a:r>
+            <a:r>
+              <a:rPr sz="1200" dirty="0" err="1"/>
+              <a:t>handrule</a:t>
+            </a:r>
+            <a:r>
+              <a:rPr sz="1200" dirty="0"/>
+              <a:t>, at zero unsafe rate. Third, the hard safety floor is essential — observation before irreversible actions is non-negotiable, and the gate only optimizes above that floor. </a:t>
+            </a:r>
+            <a:r>
+              <a:rPr sz="1100" dirty="0">
                 <a:solidFill>
                   <a:srgbClr val="94A3B8"/>
                 </a:solidFill>
               </a:rPr>
               <a:t>
-【中文参考翻译】
-三点总结。第一，观察调度是可学习的——一个在廉价特征上训练的简单逻辑门控可以决定什么时候另一次 DOM 读取值得付出代价。第二，学习方法在成功-成本前沿上优于手工规则——我们在阈值 0.2 的门控实现了 100% 成功率，比 always-observe 减少了 41% 的调用次数，比手工规则减少了 33%，零不安全率。第三，硬安全底线至关重要——不可逆操作前的观察是不可商量的，门控只在该底线以上进行优化。欢迎提问。</a:t>
+【</a:t>
+            </a:r>
+            <a:r>
+              <a:rPr sz="1100" dirty="0" err="1">
+                <a:solidFill>
+                  <a:srgbClr val="94A3B8"/>
+                </a:solidFill>
+              </a:rPr>
+              <a:t>中文参考翻译</a:t>
+            </a:r>
+            <a:r>
+              <a:rPr sz="1100" dirty="0">
+                <a:solidFill>
+                  <a:srgbClr val="94A3B8"/>
+                </a:solidFill>
+              </a:rPr>
+              <a:t>】
+</a:t>
+            </a:r>
+            <a:r>
+              <a:rPr sz="1100" dirty="0" err="1">
+                <a:solidFill>
+                  <a:srgbClr val="94A3B8"/>
+                </a:solidFill>
+              </a:rPr>
+              <a:t>三点总结。第一，观察调度是可学习的</a:t>
+            </a:r>
+            <a:r>
+              <a:rPr sz="1100" dirty="0">
+                <a:solidFill>
+                  <a:srgbClr val="94A3B8"/>
+                </a:solidFill>
+              </a:rPr>
+              <a:t>——</a:t>
+            </a:r>
+            <a:r>
+              <a:rPr sz="1100" dirty="0" err="1">
+                <a:solidFill>
+                  <a:srgbClr val="94A3B8"/>
+                </a:solidFill>
+              </a:rPr>
+              <a:t>一个在廉价特征上训练的简单逻辑门控可以决定什么时候另一次</a:t>
+            </a:r>
+            <a:r>
+              <a:rPr sz="1100" dirty="0">
+                <a:solidFill>
+                  <a:srgbClr val="94A3B8"/>
+                </a:solidFill>
+              </a:rPr>
+              <a:t> DOM </a:t>
+            </a:r>
+            <a:r>
+              <a:rPr sz="1100" dirty="0" err="1">
+                <a:solidFill>
+                  <a:srgbClr val="94A3B8"/>
+                </a:solidFill>
+              </a:rPr>
+              <a:t>读取值得付出代价。第二，学习方法在成功-成本前沿上优于手工规则</a:t>
+            </a:r>
+            <a:r>
+              <a:rPr sz="1100" dirty="0">
+                <a:solidFill>
+                  <a:srgbClr val="94A3B8"/>
+                </a:solidFill>
+              </a:rPr>
+              <a:t>——</a:t>
+            </a:r>
+            <a:r>
+              <a:rPr sz="1100" dirty="0" err="1">
+                <a:solidFill>
+                  <a:srgbClr val="94A3B8"/>
+                </a:solidFill>
+              </a:rPr>
+              <a:t>我们在阈值</a:t>
+            </a:r>
+            <a:r>
+              <a:rPr sz="1100" dirty="0">
+                <a:solidFill>
+                  <a:srgbClr val="94A3B8"/>
+                </a:solidFill>
+              </a:rPr>
+              <a:t> 0.2 </a:t>
+            </a:r>
+            <a:r>
+              <a:rPr sz="1100" dirty="0" err="1">
+                <a:solidFill>
+                  <a:srgbClr val="94A3B8"/>
+                </a:solidFill>
+              </a:rPr>
+              <a:t>的门控实现了</a:t>
+            </a:r>
+            <a:r>
+              <a:rPr sz="1100" dirty="0">
+                <a:solidFill>
+                  <a:srgbClr val="94A3B8"/>
+                </a:solidFill>
+              </a:rPr>
+              <a:t> 100% </a:t>
+            </a:r>
+            <a:r>
+              <a:rPr sz="1100" dirty="0" err="1">
+                <a:solidFill>
+                  <a:srgbClr val="94A3B8"/>
+                </a:solidFill>
+              </a:rPr>
+              <a:t>成功率，比</a:t>
+            </a:r>
+            <a:r>
+              <a:rPr sz="1100" dirty="0">
+                <a:solidFill>
+                  <a:srgbClr val="94A3B8"/>
+                </a:solidFill>
+              </a:rPr>
+              <a:t> always-observe </a:t>
+            </a:r>
+            <a:r>
+              <a:rPr sz="1100" dirty="0" err="1">
+                <a:solidFill>
+                  <a:srgbClr val="94A3B8"/>
+                </a:solidFill>
+              </a:rPr>
+              <a:t>减少了</a:t>
+            </a:r>
+            <a:r>
+              <a:rPr sz="1100" dirty="0">
+                <a:solidFill>
+                  <a:srgbClr val="94A3B8"/>
+                </a:solidFill>
+              </a:rPr>
+              <a:t> 41% </a:t>
+            </a:r>
+            <a:r>
+              <a:rPr sz="1100" dirty="0" err="1">
+                <a:solidFill>
+                  <a:srgbClr val="94A3B8"/>
+                </a:solidFill>
+              </a:rPr>
+              <a:t>的调用次数，比手工规则减少了</a:t>
+            </a:r>
+            <a:r>
+              <a:rPr sz="1100" dirty="0">
+                <a:solidFill>
+                  <a:srgbClr val="94A3B8"/>
+                </a:solidFill>
+              </a:rPr>
+              <a:t> 33%，</a:t>
+            </a:r>
+            <a:r>
+              <a:rPr sz="1100" dirty="0" err="1">
+                <a:solidFill>
+                  <a:srgbClr val="94A3B8"/>
+                </a:solidFill>
+              </a:rPr>
+              <a:t>零不安全率。第三，硬安全底线至关重要</a:t>
+            </a:r>
+            <a:r>
+              <a:rPr sz="1100" dirty="0">
+                <a:solidFill>
+                  <a:srgbClr val="94A3B8"/>
+                </a:solidFill>
+              </a:rPr>
+              <a:t>——</a:t>
+            </a:r>
+            <a:r>
+              <a:rPr sz="1100" dirty="0" err="1">
+                <a:solidFill>
+                  <a:srgbClr val="94A3B8"/>
+                </a:solidFill>
+              </a:rPr>
+              <a:t>不可逆操作前的观察是不可商量的，门控只在该底线以上进行优化</a:t>
+            </a:r>
+            <a:r>
+              <a:rPr sz="1100" dirty="0">
+                <a:solidFill>
+                  <a:srgbClr val="94A3B8"/>
+                </a:solidFill>
+              </a:rPr>
+              <a:t>。</a:t>
             </a:r>
           </a:p>
         </p:txBody>
@@ -6089,6 +6367,79 @@
           </a:p>
         </p:txBody>
       </p:sp>
+      <p:sp>
+        <p:nvSpPr>
+          <p:cNvPr id="37" name="Closing Elevation Band">
+            <a:extLst>
+              <a:ext uri="{FF2B5EF4-FFF2-40B4-BE49-F238E27FC236}">
+                <a16:creationId xmlns:a16="http://schemas.microsoft.com/office/drawing/2014/main" id="{3B594375-7A04-7E7A-9E77-5C76316C2003}"/>
+              </a:ext>
+            </a:extLst>
+          </p:cNvPr>
+          <p:cNvSpPr/>
+          <p:nvPr/>
+        </p:nvSpPr>
+        <p:spPr>
+          <a:xfrm>
+            <a:off x="666750" y="5200650"/>
+            <a:ext cx="10344150" cy="880000"/>
+          </a:xfrm>
+          <a:prstGeom prst="roundRect">
+            <a:avLst>
+              <a:gd name="adj" fmla="val 6000"/>
+            </a:avLst>
+          </a:prstGeom>
+          <a:solidFill>
+            <a:srgbClr val="0F172A"/>
+          </a:solidFill>
+        </p:spPr>
+        <p:txBody>
+          <a:bodyPr wrap="square" lIns="182880" tIns="73152" rIns="182880" bIns="73152" anchor="ctr"/>
+          <a:lstStyle/>
+          <a:p>
+            <a:pPr>
+              <a:spcAft>
+                <a:spcPts val="400"/>
+              </a:spcAft>
+            </a:pPr>
+            <a:r>
+              <a:rPr lang="en-US" sz="1000" b="1" spc="40" dirty="0">
+                <a:solidFill>
+                  <a:srgbClr val="B7C7D9"/>
+                </a:solidFill>
+                <a:latin typeface="Nunito Sans"/>
+              </a:rPr>
+              <a:t>Real web apps constantly act on state that may already be stale</a:t>
+            </a:r>
+            <a:r>
+              <a:rPr lang="en-US" altLang="zh-CN" sz="1000" b="1" spc="40" dirty="0">
+                <a:solidFill>
+                  <a:srgbClr val="B7C7D9"/>
+                </a:solidFill>
+                <a:latin typeface="Nunito Sans"/>
+              </a:rPr>
+              <a:t> — async content loading, background-resolved form fields, live-updating prices</a:t>
+            </a:r>
+            <a:endParaRPr lang="en-US" sz="1000" b="1" spc="40" dirty="0">
+              <a:solidFill>
+                <a:srgbClr val="B7C7D9"/>
+              </a:solidFill>
+              <a:latin typeface="Nunito Sans"/>
+            </a:endParaRPr>
+          </a:p>
+          <a:p>
+            <a:r>
+              <a:rPr lang="en-US" sz="1300" b="1" dirty="0">
+                <a:solidFill>
+                  <a:srgbClr val="FFFFFF"/>
+                </a:solidFill>
+                <a:latin typeface="Nunito Sans ExtraBold"/>
+              </a:rPr>
+              <a:t>So the contribution of this work is better understood as proposing and formalizing a previously unexplored research framework, rather than providing a production-ready solution for direct integration.</a:t>
+            </a:r>
+          </a:p>
+        </p:txBody>
+      </p:sp>
     </p:spTree>
     <p:extLst>
       <p:ext uri="{BB962C8B-B14F-4D97-AF65-F5344CB8AC3E}">

--- a/docs/Selective-Observation-Final-v3  -  Repaired.pptx
+++ b/docs/Selective-Observation-Final-v3  -  Repaired.pptx
@@ -1250,21 +1250,510 @@
           <a:lstStyle/>
           <a:p>
             <a:r>
-              <a:rPr sz="1200"/>
-              <a:t>[~40s] We evaluate on 15 tasks in four families. Static baseline is the control group — stable pages, no async changes — testing that coasting works when it should. Async results tasks introduce visible screen changes the hand rule can detect. The two adversarial families are more interesting. In value_drift, the page structure stays the same but a field value silently resolves — the agent might send to a placeholder email. In delayed_options, the correct dropdown choice appears late, so coasting picks the wrong index from a stale plan. These last two families specifically stress-test cases where a change detector would stay silent.</a:t>
-            </a:r>
-          </a:p>
-          <a:p>
-            <a:r>
-              <a:rPr sz="1100">
+              <a:rPr sz="1200" dirty="0"/>
+              <a:t>[~40s] We evaluate on 15 tasks in four families. Static baseline is the control group — stable pages, no async changes — testing that coasting works when it should. Async results tasks introduce visible screen changes the hand rule can detect. The two adversarial families are more interesting. In </a:t>
+            </a:r>
+            <a:r>
+              <a:rPr sz="1200" dirty="0" err="1"/>
+              <a:t>value_drift</a:t>
+            </a:r>
+            <a:r>
+              <a:rPr sz="1200" dirty="0"/>
+              <a:t>, the page structure stays the same but a field value silently resolves — the agent might send to a placeholder email. In </a:t>
+            </a:r>
+            <a:r>
+              <a:rPr sz="1200" dirty="0" err="1"/>
+              <a:t>delayed_options</a:t>
+            </a:r>
+            <a:r>
+              <a:rPr sz="1200" dirty="0"/>
+              <a:t>, the correct dropdown choice appears late, so coasting picks the wrong index from a stale plan. These last two families specifically stress-test cases where a change detector would stay silent.</a:t>
+            </a:r>
+          </a:p>
+          <a:p>
+            <a:r>
+              <a:rPr sz="1100" dirty="0">
                 <a:solidFill>
                   <a:srgbClr val="94A3B8"/>
                 </a:solidFill>
               </a:rPr>
               <a:t>
-【中文参考翻译】
-我们在 15 个任务的四个系列上进行评估。static_baseline 是对照组——稳定页面，无异步变化——测试在应该 coast 时能正确 coast。async_results 任务引入了手工规则可以检测到的可见屏幕变化。两个对抗性系列更有趣。在 value_drift 中，页面结构不变，但字段值悄悄解析——agent 可能发送到占位符邮件。在 delayed_options 中，正确的下拉选项出现得较晚，因此 coasting 从过时的计划中选错了索引。后两个系列专门压力测试变化检测器会保持沉默的情况。</a:t>
-            </a:r>
+【</a:t>
+            </a:r>
+            <a:r>
+              <a:rPr sz="1100" dirty="0" err="1">
+                <a:solidFill>
+                  <a:srgbClr val="94A3B8"/>
+                </a:solidFill>
+              </a:rPr>
+              <a:t>中文参考翻译</a:t>
+            </a:r>
+            <a:r>
+              <a:rPr sz="1100" dirty="0">
+                <a:solidFill>
+                  <a:srgbClr val="94A3B8"/>
+                </a:solidFill>
+              </a:rPr>
+              <a:t>】
+</a:t>
+            </a:r>
+            <a:r>
+              <a:rPr sz="1100" dirty="0" err="1">
+                <a:solidFill>
+                  <a:srgbClr val="94A3B8"/>
+                </a:solidFill>
+              </a:rPr>
+              <a:t>我们在</a:t>
+            </a:r>
+            <a:r>
+              <a:rPr sz="1100" dirty="0">
+                <a:solidFill>
+                  <a:srgbClr val="94A3B8"/>
+                </a:solidFill>
+              </a:rPr>
+              <a:t> 15 </a:t>
+            </a:r>
+            <a:r>
+              <a:rPr sz="1100" dirty="0" err="1">
+                <a:solidFill>
+                  <a:srgbClr val="94A3B8"/>
+                </a:solidFill>
+              </a:rPr>
+              <a:t>个任务的四个系列上进行评估。static_baseline</a:t>
+            </a:r>
+            <a:r>
+              <a:rPr sz="1100" dirty="0">
+                <a:solidFill>
+                  <a:srgbClr val="94A3B8"/>
+                </a:solidFill>
+              </a:rPr>
+              <a:t> </a:t>
+            </a:r>
+            <a:r>
+              <a:rPr sz="1100" dirty="0" err="1">
+                <a:solidFill>
+                  <a:srgbClr val="94A3B8"/>
+                </a:solidFill>
+              </a:rPr>
+              <a:t>是对照组</a:t>
+            </a:r>
+            <a:r>
+              <a:rPr sz="1100" dirty="0">
+                <a:solidFill>
+                  <a:srgbClr val="94A3B8"/>
+                </a:solidFill>
+              </a:rPr>
+              <a:t>——</a:t>
+            </a:r>
+            <a:r>
+              <a:rPr sz="1100" dirty="0" err="1">
+                <a:solidFill>
+                  <a:srgbClr val="94A3B8"/>
+                </a:solidFill>
+              </a:rPr>
+              <a:t>稳定页面，无异步变化</a:t>
+            </a:r>
+            <a:r>
+              <a:rPr sz="1100" dirty="0">
+                <a:solidFill>
+                  <a:srgbClr val="94A3B8"/>
+                </a:solidFill>
+              </a:rPr>
+              <a:t>——</a:t>
+            </a:r>
+            <a:r>
+              <a:rPr sz="1100" dirty="0" err="1">
+                <a:solidFill>
+                  <a:srgbClr val="94A3B8"/>
+                </a:solidFill>
+              </a:rPr>
+              <a:t>测试在应该</a:t>
+            </a:r>
+            <a:r>
+              <a:rPr sz="1100" dirty="0">
+                <a:solidFill>
+                  <a:srgbClr val="94A3B8"/>
+                </a:solidFill>
+              </a:rPr>
+              <a:t> coast </a:t>
+            </a:r>
+            <a:r>
+              <a:rPr sz="1100" dirty="0" err="1">
+                <a:solidFill>
+                  <a:srgbClr val="94A3B8"/>
+                </a:solidFill>
+              </a:rPr>
+              <a:t>时能正确</a:t>
+            </a:r>
+            <a:r>
+              <a:rPr sz="1100" dirty="0">
+                <a:solidFill>
+                  <a:srgbClr val="94A3B8"/>
+                </a:solidFill>
+              </a:rPr>
+              <a:t> </a:t>
+            </a:r>
+            <a:r>
+              <a:rPr sz="1100" dirty="0" err="1">
+                <a:solidFill>
+                  <a:srgbClr val="94A3B8"/>
+                </a:solidFill>
+              </a:rPr>
+              <a:t>coast。async_results</a:t>
+            </a:r>
+            <a:r>
+              <a:rPr sz="1100" dirty="0">
+                <a:solidFill>
+                  <a:srgbClr val="94A3B8"/>
+                </a:solidFill>
+              </a:rPr>
+              <a:t> </a:t>
+            </a:r>
+            <a:r>
+              <a:rPr sz="1100" dirty="0" err="1">
+                <a:solidFill>
+                  <a:srgbClr val="94A3B8"/>
+                </a:solidFill>
+              </a:rPr>
+              <a:t>任务引入了手工规则可以检测到的可见屏幕变化。两个对抗性系列更有趣。在</a:t>
+            </a:r>
+            <a:r>
+              <a:rPr sz="1100" dirty="0">
+                <a:solidFill>
+                  <a:srgbClr val="94A3B8"/>
+                </a:solidFill>
+              </a:rPr>
+              <a:t> </a:t>
+            </a:r>
+            <a:r>
+              <a:rPr sz="1100" dirty="0" err="1">
+                <a:solidFill>
+                  <a:srgbClr val="94A3B8"/>
+                </a:solidFill>
+              </a:rPr>
+              <a:t>value_drift</a:t>
+            </a:r>
+            <a:r>
+              <a:rPr sz="1100" dirty="0">
+                <a:solidFill>
+                  <a:srgbClr val="94A3B8"/>
+                </a:solidFill>
+              </a:rPr>
+              <a:t> </a:t>
+            </a:r>
+            <a:r>
+              <a:rPr sz="1100" dirty="0" err="1">
+                <a:solidFill>
+                  <a:srgbClr val="94A3B8"/>
+                </a:solidFill>
+              </a:rPr>
+              <a:t>中，页面结构不变，但字段值悄悄解析</a:t>
+            </a:r>
+            <a:r>
+              <a:rPr sz="1100" dirty="0">
+                <a:solidFill>
+                  <a:srgbClr val="94A3B8"/>
+                </a:solidFill>
+              </a:rPr>
+              <a:t>——agent </a:t>
+            </a:r>
+            <a:r>
+              <a:rPr sz="1100" dirty="0" err="1">
+                <a:solidFill>
+                  <a:srgbClr val="94A3B8"/>
+                </a:solidFill>
+              </a:rPr>
+              <a:t>可能发送到占位符邮件。在</a:t>
+            </a:r>
+            <a:r>
+              <a:rPr sz="1100" dirty="0">
+                <a:solidFill>
+                  <a:srgbClr val="94A3B8"/>
+                </a:solidFill>
+              </a:rPr>
+              <a:t> </a:t>
+            </a:r>
+            <a:r>
+              <a:rPr sz="1100" dirty="0" err="1">
+                <a:solidFill>
+                  <a:srgbClr val="94A3B8"/>
+                </a:solidFill>
+              </a:rPr>
+              <a:t>delayed_options</a:t>
+            </a:r>
+            <a:r>
+              <a:rPr sz="1100" dirty="0">
+                <a:solidFill>
+                  <a:srgbClr val="94A3B8"/>
+                </a:solidFill>
+              </a:rPr>
+              <a:t> </a:t>
+            </a:r>
+            <a:r>
+              <a:rPr sz="1100" dirty="0" err="1">
+                <a:solidFill>
+                  <a:srgbClr val="94A3B8"/>
+                </a:solidFill>
+              </a:rPr>
+              <a:t>中，正确的下拉选项出现得较晚，因此</a:t>
+            </a:r>
+            <a:r>
+              <a:rPr sz="1100" dirty="0">
+                <a:solidFill>
+                  <a:srgbClr val="94A3B8"/>
+                </a:solidFill>
+              </a:rPr>
+              <a:t> coasting </a:t>
+            </a:r>
+            <a:r>
+              <a:rPr sz="1100" dirty="0" err="1">
+                <a:solidFill>
+                  <a:srgbClr val="94A3B8"/>
+                </a:solidFill>
+              </a:rPr>
+              <a:t>从过时的计划中选错了索引。后两个系列专门压力测试变化检测器会保持沉默的情况</a:t>
+            </a:r>
+            <a:r>
+              <a:rPr sz="1100" dirty="0">
+                <a:solidFill>
+                  <a:srgbClr val="94A3B8"/>
+                </a:solidFill>
+              </a:rPr>
+              <a:t>。</a:t>
+            </a:r>
+            <a:endParaRPr lang="en-US" sz="1100" dirty="0">
+              <a:solidFill>
+                <a:srgbClr val="94A3B8"/>
+              </a:solidFill>
+            </a:endParaRPr>
+          </a:p>
+          <a:p>
+            <a:endParaRPr lang="en-US" sz="1100" dirty="0">
+              <a:solidFill>
+                <a:srgbClr val="94A3B8"/>
+              </a:solidFill>
+            </a:endParaRPr>
+          </a:p>
+          <a:p>
+            <a:r>
+              <a:rPr lang="en-US" sz="1100" dirty="0">
+                <a:solidFill>
+                  <a:srgbClr val="94A3B8"/>
+                </a:solidFill>
+              </a:rPr>
+              <a:t>static_baseline（5</a:t>
+            </a:r>
+            <a:r>
+              <a:rPr lang="zh-CN" altLang="en-US" sz="1100" dirty="0">
+                <a:solidFill>
+                  <a:srgbClr val="94A3B8"/>
+                </a:solidFill>
+              </a:rPr>
+              <a:t>个）：普通稳定工作流（</a:t>
+            </a:r>
+            <a:r>
+              <a:rPr lang="en-US" sz="1100" dirty="0">
+                <a:solidFill>
+                  <a:srgbClr val="94A3B8"/>
+                </a:solidFill>
+              </a:rPr>
+              <a:t>mail/shop/contacts/settings/files），</a:t>
+            </a:r>
+            <a:r>
+              <a:rPr lang="zh-CN" altLang="en-US" sz="1100" dirty="0">
+                <a:solidFill>
+                  <a:srgbClr val="94A3B8"/>
+                </a:solidFill>
+              </a:rPr>
+              <a:t>粗信号够用。</a:t>
+            </a:r>
+          </a:p>
+          <a:p>
+            <a:r>
+              <a:rPr lang="en-US" sz="1100" dirty="0">
+                <a:solidFill>
+                  <a:srgbClr val="94A3B8"/>
+                </a:solidFill>
+              </a:rPr>
+              <a:t>async_results（4</a:t>
+            </a:r>
+            <a:r>
+              <a:rPr lang="zh-CN" altLang="en-US" sz="1100" dirty="0">
+                <a:solidFill>
+                  <a:srgbClr val="94A3B8"/>
+                </a:solidFill>
+              </a:rPr>
+              <a:t>个）：搜索结果延迟渲染。</a:t>
+            </a:r>
+          </a:p>
+          <a:p>
+            <a:r>
+              <a:rPr lang="en-US" sz="1100" dirty="0">
+                <a:solidFill>
+                  <a:srgbClr val="94A3B8"/>
+                </a:solidFill>
+              </a:rPr>
+              <a:t>value_drift（3</a:t>
+            </a:r>
+            <a:r>
+              <a:rPr lang="zh-CN" altLang="en-US" sz="1100" dirty="0">
+                <a:solidFill>
+                  <a:srgbClr val="94A3B8"/>
+                </a:solidFill>
+              </a:rPr>
+              <a:t>个，最关键）：比如</a:t>
+            </a:r>
+            <a:r>
+              <a:rPr lang="en-US" altLang="zh-CN" sz="1100" dirty="0">
+                <a:solidFill>
+                  <a:srgbClr val="94A3B8"/>
+                </a:solidFill>
+              </a:rPr>
+              <a:t>"</a:t>
+            </a:r>
+            <a:r>
+              <a:rPr lang="zh-CN" altLang="en-US" sz="1100" dirty="0">
+                <a:solidFill>
+                  <a:srgbClr val="94A3B8"/>
+                </a:solidFill>
+              </a:rPr>
+              <a:t>建议收件人</a:t>
+            </a:r>
+            <a:r>
+              <a:rPr lang="en-US" altLang="zh-CN" sz="1100" dirty="0">
+                <a:solidFill>
+                  <a:srgbClr val="94A3B8"/>
+                </a:solidFill>
+              </a:rPr>
+              <a:t>"</a:t>
+            </a:r>
+            <a:r>
+              <a:rPr lang="zh-CN" altLang="en-US" sz="1100" dirty="0">
+                <a:solidFill>
+                  <a:srgbClr val="94A3B8"/>
+                </a:solidFill>
+              </a:rPr>
+              <a:t>字段先显示 </a:t>
+            </a:r>
+            <a:r>
+              <a:rPr lang="en-US" sz="1100" dirty="0">
+                <a:solidFill>
+                  <a:srgbClr val="94A3B8"/>
+                </a:solidFill>
+              </a:rPr>
+              <a:t>Resolving…，</a:t>
+            </a:r>
+            <a:r>
+              <a:rPr lang="zh-CN" altLang="en-US" sz="1100" dirty="0">
+                <a:solidFill>
+                  <a:srgbClr val="94A3B8"/>
+                </a:solidFill>
+              </a:rPr>
+              <a:t>过一会才解析成真实地址。控件集合从头到尾不变，只有字段的</a:t>
+            </a:r>
+            <a:r>
+              <a:rPr lang="en-US" altLang="zh-CN" sz="1100" dirty="0">
+                <a:solidFill>
+                  <a:srgbClr val="94A3B8"/>
+                </a:solidFill>
+              </a:rPr>
+              <a:t>"</a:t>
+            </a:r>
+            <a:r>
+              <a:rPr lang="zh-CN" altLang="en-US" sz="1100" dirty="0">
+                <a:solidFill>
+                  <a:srgbClr val="94A3B8"/>
+                </a:solidFill>
+              </a:rPr>
+              <a:t>值</a:t>
+            </a:r>
+            <a:r>
+              <a:rPr lang="en-US" altLang="zh-CN" sz="1100" dirty="0">
+                <a:solidFill>
+                  <a:srgbClr val="94A3B8"/>
+                </a:solidFill>
+              </a:rPr>
+              <a:t>"</a:t>
+            </a:r>
+            <a:r>
+              <a:rPr lang="zh-CN" altLang="en-US" sz="1100" dirty="0">
+                <a:solidFill>
+                  <a:srgbClr val="94A3B8"/>
+                </a:solidFill>
+              </a:rPr>
+              <a:t>变了</a:t>
+            </a:r>
+            <a:r>
+              <a:rPr lang="en-US" altLang="zh-CN" sz="1100" dirty="0">
+                <a:solidFill>
+                  <a:srgbClr val="94A3B8"/>
+                </a:solidFill>
+              </a:rPr>
+              <a:t>——</a:t>
+            </a:r>
+            <a:r>
+              <a:rPr lang="zh-CN" altLang="en-US" sz="1100" dirty="0">
+                <a:solidFill>
+                  <a:srgbClr val="94A3B8"/>
+                </a:solidFill>
+              </a:rPr>
+              <a:t>所以粗信号完全察觉不到，但模型自报的</a:t>
+            </a:r>
+            <a:r>
+              <a:rPr lang="en-US" altLang="zh-CN" sz="1100" dirty="0">
+                <a:solidFill>
+                  <a:srgbClr val="94A3B8"/>
+                </a:solidFill>
+              </a:rPr>
+              <a:t>"</a:t>
+            </a:r>
+            <a:r>
+              <a:rPr lang="zh-CN" altLang="en-US" sz="1100" dirty="0">
+                <a:solidFill>
+                  <a:srgbClr val="94A3B8"/>
+                </a:solidFill>
+              </a:rPr>
+              <a:t>信心值</a:t>
+            </a:r>
+            <a:r>
+              <a:rPr lang="en-US" altLang="zh-CN" sz="1100" dirty="0">
+                <a:solidFill>
+                  <a:srgbClr val="94A3B8"/>
+                </a:solidFill>
+              </a:rPr>
+              <a:t>"</a:t>
+            </a:r>
+            <a:r>
+              <a:rPr lang="zh-CN" altLang="en-US" sz="1100" dirty="0">
+                <a:solidFill>
+                  <a:srgbClr val="94A3B8"/>
+                </a:solidFill>
+              </a:rPr>
+              <a:t>能察觉。这是整个对比的智力核心。</a:t>
+            </a:r>
+          </a:p>
+          <a:p>
+            <a:r>
+              <a:rPr lang="en-US" sz="1100" dirty="0">
+                <a:solidFill>
+                  <a:srgbClr val="94A3B8"/>
+                </a:solidFill>
+              </a:rPr>
+              <a:t>delayed_options（3</a:t>
+            </a:r>
+            <a:r>
+              <a:rPr lang="zh-CN" altLang="en-US" sz="1100" dirty="0">
+                <a:solidFill>
+                  <a:srgbClr val="94A3B8"/>
+                </a:solidFill>
+              </a:rPr>
+              <a:t>个）：下拉框选择器不变，但正确选项要等面板加载完才出现。</a:t>
+            </a:r>
+            <a:endParaRPr sz="1100" dirty="0">
+              <a:solidFill>
+                <a:srgbClr val="94A3B8"/>
+              </a:solidFill>
+            </a:endParaRPr>
           </a:p>
         </p:txBody>
       </p:sp>
@@ -1430,21 +1919,1085 @@
           <a:lstStyle/>
           <a:p>
             <a:r>
-              <a:rPr sz="1200"/>
-              <a:t>[~50s] A key concern is whether the gate relies on fragile or hard-to-port features. So we ran a feature ablation. The full gate uses 14 features. The compact gate uses just four: no_plan, screen_changed_last, candidates_changed_last, and steps_since_observe. The compact gate still achieves 100% success and still reduces calls compared to always, though it uses more calls than the full gate. This matters for portability: the four compact features are available in almost any DOM-based agent framework, so the approach generalizes without retraining on a new feature set.</a:t>
-            </a:r>
-          </a:p>
-          <a:p>
-            <a:r>
-              <a:rPr sz="1100">
+              <a:rPr sz="1200" dirty="0"/>
+              <a:t>[~50s] A key concern is whether the gate relies on fragile or hard-to-port features. So we ran a feature ablation. The full gate uses 14 features. The compact gate uses just four: </a:t>
+            </a:r>
+            <a:r>
+              <a:rPr sz="1200" dirty="0" err="1"/>
+              <a:t>no_plan</a:t>
+            </a:r>
+            <a:r>
+              <a:rPr sz="1200" dirty="0"/>
+              <a:t>, </a:t>
+            </a:r>
+            <a:r>
+              <a:rPr sz="1200" dirty="0" err="1"/>
+              <a:t>screen_changed_last</a:t>
+            </a:r>
+            <a:r>
+              <a:rPr sz="1200" dirty="0"/>
+              <a:t>, </a:t>
+            </a:r>
+            <a:r>
+              <a:rPr sz="1200" dirty="0" err="1"/>
+              <a:t>candidates_changed_last</a:t>
+            </a:r>
+            <a:r>
+              <a:rPr sz="1200" dirty="0"/>
+              <a:t>, and </a:t>
+            </a:r>
+            <a:r>
+              <a:rPr sz="1200" dirty="0" err="1"/>
+              <a:t>steps_since_observe</a:t>
+            </a:r>
+            <a:r>
+              <a:rPr sz="1200" dirty="0"/>
+              <a:t>. The compact gate still achieves 100% success and still reduces calls compared to always, though it uses more calls than the full gate. This matters for portability: the four compact features are available in almost any DOM-based agent framework, so the approach generalizes without retraining on a new feature set.</a:t>
+            </a:r>
+          </a:p>
+          <a:p>
+            <a:r>
+              <a:rPr sz="1100" dirty="0">
                 <a:solidFill>
                   <a:srgbClr val="94A3B8"/>
                 </a:solidFill>
               </a:rPr>
               <a:t>
-【中文参考翻译】
-一个关键问题是门控是否依赖于脆弱或难以移植的特征。所以我们进行了特征消融实验。完整门控使用 14 个特征。紧凑门控只使用四个：no_plan、screen_changed_last、candidates_changed_last 和 steps_since_observe。紧凑门控仍然实现了 100% 的成功率，与 always 相比仍然减少了调用次数，尽管比完整门控使用了更多调用。这对可移植性很重要：四个紧凑特征在几乎任何基于 DOM 的 agent 框架中都可用，因此该方法无需在新特征集上重新训练即可推广。</a:t>
-            </a:r>
+【</a:t>
+            </a:r>
+            <a:r>
+              <a:rPr sz="1100" dirty="0" err="1">
+                <a:solidFill>
+                  <a:srgbClr val="94A3B8"/>
+                </a:solidFill>
+              </a:rPr>
+              <a:t>中文参考翻译</a:t>
+            </a:r>
+            <a:r>
+              <a:rPr sz="1100" dirty="0">
+                <a:solidFill>
+                  <a:srgbClr val="94A3B8"/>
+                </a:solidFill>
+              </a:rPr>
+              <a:t>】
+</a:t>
+            </a:r>
+            <a:r>
+              <a:rPr sz="1100" dirty="0" err="1">
+                <a:solidFill>
+                  <a:srgbClr val="94A3B8"/>
+                </a:solidFill>
+              </a:rPr>
+              <a:t>一个关键问题是门控是否依赖于脆弱或难以移植的特征。所以我们进行了特征消融实验。完整门控使用</a:t>
+            </a:r>
+            <a:r>
+              <a:rPr sz="1100" dirty="0">
+                <a:solidFill>
+                  <a:srgbClr val="94A3B8"/>
+                </a:solidFill>
+              </a:rPr>
+              <a:t> 14 个特征。紧凑门控只使用四个：no_plan、screen_changed_last、candidates_changed_last </a:t>
+            </a:r>
+            <a:r>
+              <a:rPr sz="1100" dirty="0" err="1">
+                <a:solidFill>
+                  <a:srgbClr val="94A3B8"/>
+                </a:solidFill>
+              </a:rPr>
+              <a:t>和</a:t>
+            </a:r>
+            <a:r>
+              <a:rPr sz="1100" dirty="0">
+                <a:solidFill>
+                  <a:srgbClr val="94A3B8"/>
+                </a:solidFill>
+              </a:rPr>
+              <a:t> </a:t>
+            </a:r>
+            <a:r>
+              <a:rPr sz="1100" dirty="0" err="1">
+                <a:solidFill>
+                  <a:srgbClr val="94A3B8"/>
+                </a:solidFill>
+              </a:rPr>
+              <a:t>steps_since_observe。紧凑门控仍然实现了</a:t>
+            </a:r>
+            <a:r>
+              <a:rPr sz="1100" dirty="0">
+                <a:solidFill>
+                  <a:srgbClr val="94A3B8"/>
+                </a:solidFill>
+              </a:rPr>
+              <a:t> 100% </a:t>
+            </a:r>
+            <a:r>
+              <a:rPr sz="1100" dirty="0" err="1">
+                <a:solidFill>
+                  <a:srgbClr val="94A3B8"/>
+                </a:solidFill>
+              </a:rPr>
+              <a:t>的成功率，与</a:t>
+            </a:r>
+            <a:r>
+              <a:rPr sz="1100" dirty="0">
+                <a:solidFill>
+                  <a:srgbClr val="94A3B8"/>
+                </a:solidFill>
+              </a:rPr>
+              <a:t> always </a:t>
+            </a:r>
+            <a:r>
+              <a:rPr sz="1100" dirty="0" err="1">
+                <a:solidFill>
+                  <a:srgbClr val="94A3B8"/>
+                </a:solidFill>
+              </a:rPr>
+              <a:t>相比仍然减少了调用次数，尽管比完整门控使用了更多调用。这对可移植性很重要：四个紧凑特征在几乎任何基于</a:t>
+            </a:r>
+            <a:r>
+              <a:rPr sz="1100" dirty="0">
+                <a:solidFill>
+                  <a:srgbClr val="94A3B8"/>
+                </a:solidFill>
+              </a:rPr>
+              <a:t> DOM </a:t>
+            </a:r>
+            <a:r>
+              <a:rPr sz="1100" dirty="0" err="1">
+                <a:solidFill>
+                  <a:srgbClr val="94A3B8"/>
+                </a:solidFill>
+              </a:rPr>
+              <a:t>的</a:t>
+            </a:r>
+            <a:r>
+              <a:rPr sz="1100" dirty="0">
+                <a:solidFill>
+                  <a:srgbClr val="94A3B8"/>
+                </a:solidFill>
+              </a:rPr>
+              <a:t> agent </a:t>
+            </a:r>
+            <a:r>
+              <a:rPr sz="1100" dirty="0" err="1">
+                <a:solidFill>
+                  <a:srgbClr val="94A3B8"/>
+                </a:solidFill>
+              </a:rPr>
+              <a:t>框架中都可用，因此该方法无需在新特征集上重新训练即可推广</a:t>
+            </a:r>
+            <a:r>
+              <a:rPr sz="1100" dirty="0">
+                <a:solidFill>
+                  <a:srgbClr val="94A3B8"/>
+                </a:solidFill>
+              </a:rPr>
+              <a:t>。</a:t>
+            </a:r>
+            <a:endParaRPr lang="en-US" sz="1100" dirty="0">
+              <a:solidFill>
+                <a:srgbClr val="94A3B8"/>
+              </a:solidFill>
+            </a:endParaRPr>
+          </a:p>
+          <a:p>
+            <a:endParaRPr lang="en-US" sz="1100" dirty="0">
+              <a:solidFill>
+                <a:srgbClr val="94A3B8"/>
+              </a:solidFill>
+            </a:endParaRPr>
+          </a:p>
+          <a:p>
+            <a:r>
+              <a:rPr lang="zh-CN" altLang="en-US" sz="1200" b="0" i="0" kern="1200" dirty="0">
+                <a:effectLst/>
+              </a:rPr>
+              <a:t>门控拿到的就是下面这个 </a:t>
+            </a:r>
+            <a:r>
+              <a:rPr lang="en-US" altLang="zh-CN" sz="1200" b="1" i="0" kern="1200" dirty="0">
+                <a:effectLst/>
+              </a:rPr>
+              <a:t>15 </a:t>
+            </a:r>
+            <a:r>
+              <a:rPr lang="zh-CN" altLang="en-US" sz="1200" b="1" i="0" kern="1200" dirty="0">
+                <a:effectLst/>
+              </a:rPr>
+              <a:t>维向量</a:t>
+            </a:r>
+            <a:r>
+              <a:rPr lang="en-US" altLang="zh-CN" sz="1200" b="0" i="0" kern="1200" dirty="0">
+                <a:effectLst/>
+              </a:rPr>
+              <a:t>(1 </a:t>
+            </a:r>
+            <a:r>
+              <a:rPr lang="zh-CN" altLang="en-US" sz="1200" b="0" i="0" kern="1200" dirty="0">
+                <a:effectLst/>
+              </a:rPr>
+              <a:t>个 </a:t>
+            </a:r>
+            <a:r>
+              <a:rPr lang="en-US" altLang="zh-CN" sz="1200" b="0" i="0" kern="1200" dirty="0">
+                <a:effectLst/>
+              </a:rPr>
+              <a:t>bias + 14 </a:t>
+            </a:r>
+            <a:r>
+              <a:rPr lang="zh-CN" altLang="en-US" sz="1200" b="0" i="0" kern="1200" dirty="0">
+                <a:effectLst/>
+              </a:rPr>
+              <a:t>个特征</a:t>
+            </a:r>
+            <a:r>
+              <a:rPr lang="en-US" altLang="zh-CN" sz="1200" b="0" i="0" kern="1200" dirty="0">
+                <a:effectLst/>
+              </a:rPr>
+              <a:t>),</a:t>
+            </a:r>
+            <a:r>
+              <a:rPr lang="zh-CN" altLang="en-US" sz="1200" b="0" i="0" kern="1200" dirty="0">
+                <a:effectLst/>
+              </a:rPr>
+              <a:t>全部是观察之前就能算出来的廉价信号</a:t>
+            </a:r>
+            <a:r>
+              <a:rPr lang="en-US" altLang="zh-CN" sz="1200" b="0" i="0" kern="1200" dirty="0">
+                <a:effectLst/>
+              </a:rPr>
+              <a:t>:</a:t>
+            </a:r>
+          </a:p>
+          <a:p>
+            <a:r>
+              <a:rPr lang="zh-CN" altLang="en-US" sz="1200" b="0" i="0" kern="1200" dirty="0">
+                <a:effectLst/>
+              </a:rPr>
+              <a:t>特征                                           值                含义</a:t>
+            </a:r>
+            <a:endParaRPr lang="en-US" altLang="zh-CN" sz="1200" b="0" i="0" kern="1200" dirty="0">
+              <a:effectLst/>
+            </a:endParaRPr>
+          </a:p>
+          <a:p>
+            <a:r>
+              <a:rPr lang="en-US" altLang="zh-CN" sz="1200" b="0" i="0" kern="1200" dirty="0">
+                <a:effectLst/>
+              </a:rPr>
+              <a:t>Bias</a:t>
+            </a:r>
+            <a:r>
+              <a:rPr lang="zh-CN" altLang="en-US" sz="1200" b="0" i="0" kern="1200" dirty="0">
+                <a:effectLst/>
+              </a:rPr>
+              <a:t>                                            </a:t>
+            </a:r>
+            <a:r>
+              <a:rPr lang="en-US" altLang="zh-CN" sz="1200" b="0" i="0" kern="1200" dirty="0">
+                <a:effectLst/>
+              </a:rPr>
+              <a:t>1</a:t>
+            </a:r>
+            <a:r>
+              <a:rPr lang="zh-CN" altLang="en-US" sz="1200" b="0" i="0" kern="1200" dirty="0">
+                <a:effectLst/>
+              </a:rPr>
+              <a:t>                 截距项</a:t>
+            </a:r>
+            <a:r>
+              <a:rPr lang="en-US" altLang="zh-CN" sz="1200" b="0" i="0" kern="1200" dirty="0">
+                <a:effectLst/>
+              </a:rPr>
+              <a:t>(</a:t>
+            </a:r>
+            <a:r>
+              <a:rPr lang="zh-CN" altLang="en-US" sz="1200" b="0" i="0" kern="1200" dirty="0">
+                <a:effectLst/>
+              </a:rPr>
+              <a:t>恒为</a:t>
+            </a:r>
+            <a:r>
+              <a:rPr lang="en-US" altLang="zh-CN" sz="1200" b="0" i="0" kern="1200" dirty="0">
+                <a:effectLst/>
+              </a:rPr>
+              <a:t>1)</a:t>
+            </a:r>
+          </a:p>
+          <a:p>
+            <a:r>
+              <a:rPr lang="en-US" altLang="zh-CN" sz="1200" b="0" i="0" kern="1200" dirty="0" err="1">
+                <a:effectLst/>
+              </a:rPr>
+              <a:t>no_plan</a:t>
+            </a:r>
+            <a:r>
+              <a:rPr lang="zh-CN" altLang="en-US" sz="1200" b="0" i="0" kern="1200" dirty="0">
+                <a:effectLst/>
+              </a:rPr>
+              <a:t>                                      </a:t>
+            </a:r>
+            <a:r>
+              <a:rPr lang="en-US" altLang="zh-CN" sz="1200" b="0" i="0" kern="1200" dirty="0">
+                <a:effectLst/>
+              </a:rPr>
+              <a:t>0</a:t>
+            </a:r>
+            <a:r>
+              <a:rPr lang="zh-CN" altLang="en-US" sz="1200" b="0" i="0" kern="1200" dirty="0">
+                <a:effectLst/>
+              </a:rPr>
+              <a:t>                 手里</a:t>
+            </a:r>
+            <a:r>
+              <a:rPr lang="zh-CN" altLang="en-US" sz="1200" b="1" i="0" kern="1200" dirty="0">
+                <a:effectLst/>
+              </a:rPr>
+              <a:t>有</a:t>
+            </a:r>
+            <a:r>
+              <a:rPr lang="zh-CN" altLang="en-US" sz="1200" b="0" i="0" kern="1200" dirty="0">
+                <a:effectLst/>
+              </a:rPr>
+              <a:t>计划</a:t>
+            </a:r>
+            <a:r>
+              <a:rPr lang="en-US" altLang="zh-CN" sz="1200" b="0" i="0" kern="1200" dirty="0">
+                <a:effectLst/>
+              </a:rPr>
+              <a:t>(</a:t>
+            </a:r>
+            <a:r>
+              <a:rPr lang="zh-CN" altLang="en-US" sz="1200" b="0" i="0" kern="1200" dirty="0">
+                <a:effectLst/>
+              </a:rPr>
+              <a:t>不是</a:t>
+            </a:r>
+            <a:r>
+              <a:rPr lang="en-US" altLang="zh-CN" sz="1200" b="0" i="0" kern="1200" dirty="0">
+                <a:effectLst/>
+              </a:rPr>
+              <a:t>0</a:t>
+            </a:r>
+            <a:r>
+              <a:rPr lang="zh-CN" altLang="en-US" sz="1200" b="0" i="0" kern="1200" dirty="0">
+                <a:effectLst/>
+              </a:rPr>
+              <a:t>就表示有</a:t>
+            </a:r>
+            <a:r>
+              <a:rPr lang="en-US" altLang="zh-CN" sz="1200" b="0" i="0" kern="1200" dirty="0">
+                <a:effectLst/>
+              </a:rPr>
+              <a:t>)</a:t>
+            </a:r>
+          </a:p>
+          <a:p>
+            <a:r>
+              <a:rPr lang="en-US" altLang="zh-CN" sz="1200" b="0" i="0" kern="1200" dirty="0" err="1">
+                <a:effectLst/>
+              </a:rPr>
+              <a:t>screen_changed_last</a:t>
+            </a:r>
+            <a:r>
+              <a:rPr lang="zh-CN" altLang="en-US" sz="1200" b="0" i="0" kern="1200" dirty="0">
+                <a:effectLst/>
+              </a:rPr>
+              <a:t>                  </a:t>
+            </a:r>
+            <a:r>
+              <a:rPr lang="en-US" altLang="zh-CN" sz="1200" b="0" i="0" kern="1200" dirty="0">
+                <a:effectLst/>
+              </a:rPr>
+              <a:t>1</a:t>
+            </a:r>
+            <a:r>
+              <a:rPr lang="zh-CN" altLang="en-US" sz="1200" b="0" i="0" kern="1200" dirty="0">
+                <a:effectLst/>
+              </a:rPr>
+              <a:t>                 上一步之后屏幕</a:t>
+            </a:r>
+            <a:r>
+              <a:rPr lang="zh-CN" altLang="en-US" sz="1200" b="1" i="0" kern="1200" dirty="0">
+                <a:effectLst/>
+              </a:rPr>
+              <a:t>变了</a:t>
+            </a:r>
+            <a:endParaRPr lang="en-US" altLang="zh-CN" sz="1200" b="1" i="0" kern="1200" dirty="0">
+              <a:effectLst/>
+            </a:endParaRPr>
+          </a:p>
+          <a:p>
+            <a:r>
+              <a:rPr lang="en-US" altLang="zh-CN" sz="1200" b="0" i="0" kern="1200" dirty="0" err="1">
+                <a:effectLst/>
+              </a:rPr>
+              <a:t>candidates_changed_last</a:t>
+            </a:r>
+            <a:r>
+              <a:rPr lang="zh-CN" altLang="en-US" sz="1200" b="0" i="0" kern="1200" dirty="0">
+                <a:effectLst/>
+              </a:rPr>
+              <a:t>           </a:t>
+            </a:r>
+            <a:r>
+              <a:rPr lang="en-US" altLang="zh-CN" sz="1200" b="0" i="0" kern="1200" dirty="0">
+                <a:effectLst/>
+              </a:rPr>
+              <a:t>1</a:t>
+            </a:r>
+            <a:r>
+              <a:rPr lang="zh-CN" altLang="en-US" sz="1200" b="0" i="0" kern="1200" dirty="0">
+                <a:effectLst/>
+              </a:rPr>
+              <a:t>                 可点击控件集合</a:t>
+            </a:r>
+            <a:r>
+              <a:rPr lang="zh-CN" altLang="en-US" sz="1200" b="1" i="0" kern="1200" dirty="0">
+                <a:effectLst/>
+              </a:rPr>
+              <a:t>变了</a:t>
+            </a:r>
+            <a:endParaRPr lang="en-US" altLang="zh-CN" sz="1200" b="1" i="0" kern="1200" dirty="0">
+              <a:effectLst/>
+            </a:endParaRPr>
+          </a:p>
+          <a:p>
+            <a:r>
+              <a:rPr lang="en-US" altLang="zh-CN" sz="1200" b="0" i="0" kern="1200" dirty="0" err="1">
+                <a:effectLst/>
+              </a:rPr>
+              <a:t>steps_since_observe</a:t>
+            </a:r>
+            <a:r>
+              <a:rPr lang="zh-CN" altLang="en-US" sz="1200" b="0" i="0" kern="1200" dirty="0">
+                <a:effectLst/>
+              </a:rPr>
+              <a:t>                   </a:t>
+            </a:r>
+            <a:r>
+              <a:rPr lang="en-US" altLang="zh-CN" sz="1200" b="0" i="0" kern="1200" dirty="0">
+                <a:effectLst/>
+              </a:rPr>
+              <a:t>0.1</a:t>
+            </a:r>
+            <a:r>
+              <a:rPr lang="zh-CN" altLang="en-US" sz="1200" b="0" i="0" kern="1200" dirty="0">
+                <a:effectLst/>
+              </a:rPr>
+              <a:t>              距上次观察走了 </a:t>
+            </a:r>
+            <a:r>
+              <a:rPr lang="en-US" altLang="zh-CN" sz="1200" b="0" i="0" kern="1200" dirty="0">
+                <a:effectLst/>
+              </a:rPr>
+              <a:t>1 </a:t>
+            </a:r>
+            <a:r>
+              <a:rPr lang="zh-CN" altLang="en-US" sz="1200" b="0" i="0" kern="1200" dirty="0">
+                <a:effectLst/>
+              </a:rPr>
+              <a:t>步</a:t>
+            </a:r>
+            <a:r>
+              <a:rPr lang="en-US" altLang="zh-CN" sz="1200" b="0" i="0" kern="1200" dirty="0">
+                <a:effectLst/>
+              </a:rPr>
+              <a:t>(</a:t>
+            </a:r>
+            <a:r>
+              <a:rPr lang="zh-CN" altLang="en-US" sz="1200" b="0" i="0" kern="1200" dirty="0">
+                <a:effectLst/>
+              </a:rPr>
+              <a:t>归一化 </a:t>
+            </a:r>
+            <a:r>
+              <a:rPr lang="en-US" altLang="zh-CN" sz="1200" b="0" i="0" kern="1200" dirty="0">
+                <a:effectLst/>
+              </a:rPr>
+              <a:t>1/10)</a:t>
+            </a:r>
+          </a:p>
+          <a:p>
+            <a:r>
+              <a:rPr lang="en-US" altLang="zh-CN" sz="1200" b="0" i="0" kern="1200" dirty="0" err="1">
+                <a:effectLst/>
+              </a:rPr>
+              <a:t>remaining_plan_len</a:t>
+            </a:r>
+            <a:r>
+              <a:rPr lang="zh-CN" altLang="en-US" sz="1200" b="0" i="0" kern="1200" dirty="0">
+                <a:effectLst/>
+              </a:rPr>
+              <a:t>                    </a:t>
+            </a:r>
+            <a:r>
+              <a:rPr lang="en-US" altLang="zh-CN" sz="1200" b="0" i="0" kern="1200" dirty="0">
+                <a:effectLst/>
+              </a:rPr>
+              <a:t>0.25</a:t>
+            </a:r>
+            <a:r>
+              <a:rPr lang="zh-CN" altLang="en-US" sz="1200" b="0" i="0" kern="1200" dirty="0">
+                <a:effectLst/>
+              </a:rPr>
+              <a:t>            计划还剩 </a:t>
+            </a:r>
+            <a:r>
+              <a:rPr lang="en-US" altLang="zh-CN" sz="1200" b="0" i="0" kern="1200" dirty="0">
+                <a:effectLst/>
+              </a:rPr>
+              <a:t>2 </a:t>
+            </a:r>
+            <a:r>
+              <a:rPr lang="zh-CN" altLang="en-US" sz="1200" b="0" i="0" kern="1200" dirty="0">
+                <a:effectLst/>
+              </a:rPr>
+              <a:t>步</a:t>
+            </a:r>
+            <a:r>
+              <a:rPr lang="en-US" altLang="zh-CN" sz="1200" b="0" i="0" kern="1200" dirty="0">
+                <a:effectLst/>
+              </a:rPr>
+              <a:t>(</a:t>
+            </a:r>
+            <a:r>
+              <a:rPr lang="zh-CN" altLang="en-US" sz="1200" b="0" i="0" kern="1200" dirty="0">
+                <a:effectLst/>
+              </a:rPr>
+              <a:t>归一化 </a:t>
+            </a:r>
+            <a:r>
+              <a:rPr lang="en-US" altLang="zh-CN" sz="1200" b="0" i="0" kern="1200" dirty="0">
+                <a:effectLst/>
+              </a:rPr>
+              <a:t>2/8)</a:t>
+            </a:r>
+          </a:p>
+          <a:p>
+            <a:r>
+              <a:rPr lang="en-US" altLang="zh-CN" sz="1200" b="0" i="0" kern="1200" dirty="0" err="1">
+                <a:effectLst/>
+              </a:rPr>
+              <a:t>next_is_click</a:t>
+            </a:r>
+            <a:r>
+              <a:rPr lang="zh-CN" altLang="en-US" sz="1200" b="0" i="0" kern="1200" dirty="0">
+                <a:effectLst/>
+              </a:rPr>
+              <a:t>                                </a:t>
+            </a:r>
+            <a:r>
+              <a:rPr lang="en-US" altLang="zh-CN" sz="1200" b="0" i="0" kern="1200" dirty="0">
+                <a:effectLst/>
+              </a:rPr>
+              <a:t>0</a:t>
+            </a:r>
+            <a:r>
+              <a:rPr lang="zh-CN" altLang="en-US" sz="1200" b="0" i="0" kern="1200" dirty="0">
+                <a:effectLst/>
+              </a:rPr>
+              <a:t>                </a:t>
+            </a:r>
+            <a:r>
+              <a:rPr lang="en-US" altLang="zh-CN" sz="1200" b="0" i="0" kern="1200" dirty="0">
+                <a:effectLst/>
+              </a:rPr>
+              <a:t>┐</a:t>
+            </a:r>
+          </a:p>
+          <a:p>
+            <a:r>
+              <a:rPr lang="en-US" altLang="zh-CN" sz="1200" b="0" i="0" kern="1200" dirty="0" err="1">
+                <a:effectLst/>
+              </a:rPr>
+              <a:t>next_is_fill</a:t>
+            </a:r>
+            <a:r>
+              <a:rPr lang="zh-CN" altLang="en-US" sz="1200" b="0" i="0" kern="1200" dirty="0">
+                <a:effectLst/>
+              </a:rPr>
+              <a:t>                                   </a:t>
+            </a:r>
+            <a:r>
+              <a:rPr lang="en-US" altLang="zh-CN" sz="1200" b="1" i="0" kern="1200" dirty="0">
+                <a:effectLst/>
+              </a:rPr>
+              <a:t>1</a:t>
+            </a:r>
+            <a:r>
+              <a:rPr lang="zh-CN" altLang="en-US" sz="1200" b="1" i="0" kern="1200" dirty="0">
+                <a:effectLst/>
+              </a:rPr>
+              <a:t>                </a:t>
+            </a:r>
+            <a:r>
+              <a:rPr lang="en-US" altLang="zh-CN" sz="1200" b="0" i="0" kern="1200" dirty="0">
+                <a:effectLst/>
+              </a:rPr>
+              <a:t>│ </a:t>
+            </a:r>
+            <a:r>
+              <a:rPr lang="zh-CN" altLang="en-US" sz="1200" b="1" i="0" kern="1200" dirty="0">
+                <a:effectLst/>
+              </a:rPr>
+              <a:t>下一个动作类型 </a:t>
+            </a:r>
+            <a:r>
+              <a:rPr lang="en-US" altLang="zh-CN" sz="1200" b="1" i="0" kern="1200" dirty="0">
+                <a:effectLst/>
+              </a:rPr>
+              <a:t>= fill(</a:t>
+            </a:r>
+            <a:r>
+              <a:rPr lang="zh-CN" altLang="en-US" sz="1200" b="1" i="0" kern="1200" dirty="0">
+                <a:effectLst/>
+              </a:rPr>
+              <a:t>填写</a:t>
+            </a:r>
+            <a:r>
+              <a:rPr lang="en-US" altLang="zh-CN" sz="1200" b="1" i="0" kern="1200" dirty="0">
+                <a:effectLst/>
+              </a:rPr>
+              <a:t>)</a:t>
+            </a:r>
+          </a:p>
+          <a:p>
+            <a:r>
+              <a:rPr lang="en-US" altLang="zh-CN" sz="1200" b="0" i="0" kern="1200" dirty="0" err="1">
+                <a:effectLst/>
+              </a:rPr>
+              <a:t>next_is_check</a:t>
+            </a:r>
+            <a:r>
+              <a:rPr lang="zh-CN" altLang="en-US" sz="1200" b="0" i="0" kern="1200" dirty="0">
+                <a:effectLst/>
+              </a:rPr>
+              <a:t>                              </a:t>
+            </a:r>
+            <a:r>
+              <a:rPr lang="en-US" altLang="zh-CN" sz="1200" b="0" i="0" kern="1200" dirty="0">
+                <a:effectLst/>
+              </a:rPr>
+              <a:t>0</a:t>
+            </a:r>
+            <a:r>
+              <a:rPr lang="zh-CN" altLang="en-US" sz="1200" b="0" i="0" kern="1200" dirty="0">
+                <a:effectLst/>
+              </a:rPr>
+              <a:t>                </a:t>
+            </a:r>
+            <a:r>
+              <a:rPr lang="en-US" altLang="zh-CN" sz="1200" b="0" i="0" kern="1200" dirty="0">
+                <a:effectLst/>
+              </a:rPr>
+              <a:t>│ ←</a:t>
+            </a:r>
+            <a:r>
+              <a:rPr lang="zh-CN" altLang="en-US" sz="1200" b="0" i="0" kern="1200" dirty="0">
+                <a:effectLst/>
+              </a:rPr>
+              <a:t>这 </a:t>
+            </a:r>
+            <a:r>
+              <a:rPr lang="en-US" altLang="zh-CN" sz="1200" b="0" i="0" kern="1200" dirty="0">
+                <a:effectLst/>
+              </a:rPr>
+              <a:t>4 </a:t>
+            </a:r>
+            <a:r>
+              <a:rPr lang="zh-CN" altLang="en-US" sz="1200" b="0" i="0" kern="1200" dirty="0">
+                <a:effectLst/>
+              </a:rPr>
+              <a:t>个就是 </a:t>
+            </a:r>
+            <a:r>
+              <a:rPr lang="en-US" altLang="zh-CN" sz="1200" b="0" i="0" kern="1200" dirty="0">
+                <a:effectLst/>
+              </a:rPr>
+              <a:t>PPT </a:t>
+            </a:r>
+            <a:r>
+              <a:rPr lang="zh-CN" altLang="en-US" sz="1200" b="0" i="0" kern="1200" dirty="0">
+                <a:effectLst/>
+              </a:rPr>
+              <a:t>里折叠的 </a:t>
+            </a:r>
+            <a:endParaRPr lang="en-US" altLang="zh-CN" sz="1200" b="0" i="0" kern="1200" dirty="0">
+              <a:effectLst/>
+            </a:endParaRPr>
+          </a:p>
+          <a:p>
+            <a:r>
+              <a:rPr lang="en-US" altLang="zh-CN" sz="1200" b="0" i="0" kern="1200" dirty="0" err="1">
+                <a:effectLst/>
+              </a:rPr>
+              <a:t>next_action_typenext_is_select</a:t>
+            </a:r>
+            <a:r>
+              <a:rPr lang="zh-CN" altLang="en-US" sz="1200" b="0" i="0" kern="1200" dirty="0">
+                <a:effectLst/>
+              </a:rPr>
+              <a:t>   </a:t>
+            </a:r>
+            <a:r>
+              <a:rPr lang="en-US" altLang="zh-CN" sz="1200" b="0" i="0" kern="1200" dirty="0">
+                <a:effectLst/>
+              </a:rPr>
+              <a:t>0</a:t>
+            </a:r>
+            <a:r>
+              <a:rPr lang="zh-CN" altLang="en-US" sz="1200" b="0" i="0" kern="1200" dirty="0">
+                <a:effectLst/>
+              </a:rPr>
+              <a:t>                </a:t>
+            </a:r>
+            <a:r>
+              <a:rPr lang="en-US" altLang="zh-CN" sz="1200" b="0" i="0" kern="1200" dirty="0">
+                <a:effectLst/>
+              </a:rPr>
+              <a:t>┘</a:t>
+            </a:r>
+          </a:p>
+          <a:p>
+            <a:r>
+              <a:rPr lang="en-US" altLang="zh-CN" sz="1200" b="0" i="0" kern="1200" dirty="0" err="1">
+                <a:effectLst/>
+              </a:rPr>
+              <a:t>next_risk_state_changing</a:t>
+            </a:r>
+            <a:r>
+              <a:rPr lang="zh-CN" altLang="en-US" sz="1200" b="0" i="0" kern="1200" dirty="0">
+                <a:effectLst/>
+              </a:rPr>
+              <a:t>            </a:t>
+            </a:r>
+            <a:r>
+              <a:rPr lang="en-US" altLang="zh-CN" sz="1200" b="0" i="0" kern="1200" dirty="0">
+                <a:effectLst/>
+              </a:rPr>
+              <a:t>0</a:t>
+            </a:r>
+            <a:r>
+              <a:rPr lang="zh-CN" altLang="en-US" sz="1200" b="0" i="0" kern="1200" dirty="0">
+                <a:effectLst/>
+              </a:rPr>
+              <a:t>                </a:t>
+            </a:r>
+            <a:r>
+              <a:rPr lang="en-US" altLang="zh-CN" sz="1200" b="0" i="0" kern="1200" dirty="0">
+                <a:effectLst/>
+              </a:rPr>
+              <a:t>┐</a:t>
+            </a:r>
+          </a:p>
+          <a:p>
+            <a:r>
+              <a:rPr lang="en-US" altLang="zh-CN" sz="1200" b="0" i="0" kern="1200" dirty="0" err="1">
+                <a:effectLst/>
+              </a:rPr>
+              <a:t>next_risk_external</a:t>
+            </a:r>
+            <a:r>
+              <a:rPr lang="zh-CN" altLang="en-US" sz="1200" b="0" i="0" kern="1200" dirty="0">
+                <a:effectLst/>
+              </a:rPr>
+              <a:t>                        </a:t>
+            </a:r>
+            <a:r>
+              <a:rPr lang="en-US" altLang="zh-CN" sz="1200" b="0" i="0" kern="1200" dirty="0">
+                <a:effectLst/>
+              </a:rPr>
+              <a:t>0</a:t>
+            </a:r>
+            <a:r>
+              <a:rPr lang="zh-CN" altLang="en-US" sz="1200" b="0" i="0" kern="1200" dirty="0">
+                <a:effectLst/>
+              </a:rPr>
+              <a:t>                </a:t>
+            </a:r>
+            <a:r>
+              <a:rPr lang="en-US" altLang="zh-CN" sz="1200" b="0" i="0" kern="1200" dirty="0">
+                <a:effectLst/>
+              </a:rPr>
+              <a:t>│ </a:t>
+            </a:r>
+            <a:r>
+              <a:rPr lang="zh-CN" altLang="en-US" sz="1200" b="1" i="0" kern="1200" dirty="0">
+                <a:effectLst/>
+              </a:rPr>
+              <a:t>下一动作风险 </a:t>
+            </a:r>
+            <a:r>
+              <a:rPr lang="en-US" altLang="zh-CN" sz="1200" b="1" i="0" kern="1200" dirty="0">
+                <a:effectLst/>
+              </a:rPr>
+              <a:t>= safe(</a:t>
+            </a:r>
+            <a:r>
+              <a:rPr lang="zh-CN" altLang="en-US" sz="1200" b="1" i="0" kern="1200" dirty="0">
+                <a:effectLst/>
+              </a:rPr>
+              <a:t>三个都</a:t>
+            </a:r>
+            <a:r>
+              <a:rPr lang="en-US" altLang="zh-CN" sz="1200" b="1" i="0" kern="1200" dirty="0">
+                <a:effectLst/>
+              </a:rPr>
+              <a:t>0)</a:t>
+            </a:r>
+          </a:p>
+          <a:p>
+            <a:r>
+              <a:rPr lang="en-US" altLang="zh-CN" sz="1200" b="0" i="0" kern="1200" dirty="0" err="1">
+                <a:effectLst/>
+              </a:rPr>
+              <a:t>next_risk_irreversible</a:t>
+            </a:r>
+            <a:r>
+              <a:rPr lang="zh-CN" altLang="en-US" sz="1200" b="0" i="0" kern="1200" dirty="0">
+                <a:effectLst/>
+              </a:rPr>
+              <a:t>                   </a:t>
+            </a:r>
+            <a:r>
+              <a:rPr lang="en-US" altLang="zh-CN" sz="1200" b="0" i="0" kern="1200" dirty="0">
+                <a:effectLst/>
+              </a:rPr>
+              <a:t>0</a:t>
+            </a:r>
+            <a:r>
+              <a:rPr lang="zh-CN" altLang="en-US" sz="1200" b="0" i="0" kern="1200" dirty="0">
+                <a:effectLst/>
+              </a:rPr>
+              <a:t>                </a:t>
+            </a:r>
+            <a:r>
+              <a:rPr lang="en-US" altLang="zh-CN" sz="1200" b="0" i="0" kern="1200" dirty="0">
+                <a:effectLst/>
+              </a:rPr>
+              <a:t>┘ ←</a:t>
+            </a:r>
+            <a:r>
+              <a:rPr lang="zh-CN" altLang="en-US" sz="1200" b="0" i="0" kern="1200" dirty="0">
+                <a:effectLst/>
+              </a:rPr>
+              <a:t>这 </a:t>
+            </a:r>
+            <a:r>
+              <a:rPr lang="en-US" altLang="zh-CN" sz="1200" b="0" i="0" kern="1200" dirty="0">
+                <a:effectLst/>
+              </a:rPr>
+              <a:t>3 </a:t>
+            </a:r>
+            <a:r>
+              <a:rPr lang="zh-CN" altLang="en-US" sz="1200" b="0" i="0" kern="1200" dirty="0">
+                <a:effectLst/>
+              </a:rPr>
+              <a:t>个就是 </a:t>
+            </a:r>
+            <a:r>
+              <a:rPr lang="en-US" altLang="zh-CN" sz="1200" b="0" i="0" kern="1200" dirty="0">
+                <a:effectLst/>
+              </a:rPr>
+              <a:t>PPT </a:t>
+            </a:r>
+            <a:r>
+              <a:rPr lang="zh-CN" altLang="en-US" sz="1200" b="0" i="0" kern="1200" dirty="0">
+                <a:effectLst/>
+              </a:rPr>
+              <a:t>里折叠的 </a:t>
+            </a:r>
+            <a:endParaRPr lang="en-US" altLang="zh-CN" sz="1200" b="0" i="0" kern="1200" dirty="0">
+              <a:effectLst/>
+            </a:endParaRPr>
+          </a:p>
+          <a:p>
+            <a:r>
+              <a:rPr lang="en-US" altLang="zh-CN" sz="1200" b="0" i="0" kern="1200" dirty="0">
+                <a:effectLst/>
+              </a:rPr>
+              <a:t>risk </a:t>
+            </a:r>
+            <a:r>
+              <a:rPr lang="en-US" altLang="zh-CN" sz="1200" b="0" i="0" kern="1200" dirty="0" err="1">
+                <a:effectLst/>
+              </a:rPr>
+              <a:t>flagsverbalized_confidence</a:t>
+            </a:r>
+            <a:r>
+              <a:rPr lang="zh-CN" altLang="en-US" sz="1200" b="0" i="0" kern="1200" dirty="0">
+                <a:effectLst/>
+              </a:rPr>
+              <a:t>   </a:t>
+            </a:r>
+            <a:r>
+              <a:rPr lang="en-US" altLang="zh-CN" sz="1200" b="0" i="0" kern="1200" dirty="0">
+                <a:effectLst/>
+              </a:rPr>
+              <a:t>1</a:t>
+            </a:r>
+            <a:r>
+              <a:rPr lang="zh-CN" altLang="en-US" sz="1200" b="0" i="0" kern="1200" dirty="0">
+                <a:effectLst/>
+              </a:rPr>
+              <a:t>              模型自报</a:t>
+            </a:r>
+            <a:r>
+              <a:rPr lang="en-US" altLang="zh-CN" sz="1200" b="0" i="0" kern="1200" dirty="0">
+                <a:effectLst/>
+              </a:rPr>
+              <a:t>"</a:t>
+            </a:r>
+            <a:r>
+              <a:rPr lang="zh-CN" altLang="en-US" sz="1200" b="0" i="0" kern="1200" dirty="0">
+                <a:effectLst/>
+              </a:rPr>
+              <a:t>我有 </a:t>
+            </a:r>
+            <a:r>
+              <a:rPr lang="en-US" altLang="zh-CN" sz="1200" b="0" i="0" kern="1200" dirty="0">
+                <a:effectLst/>
+              </a:rPr>
+              <a:t>100% </a:t>
+            </a:r>
+            <a:r>
+              <a:rPr lang="zh-CN" altLang="en-US" sz="1200" b="0" i="0" kern="1200" dirty="0">
+                <a:effectLst/>
+              </a:rPr>
+              <a:t>把握</a:t>
+            </a:r>
+            <a:r>
+              <a:rPr lang="en-US" altLang="zh-CN" sz="1200" b="0" i="0" kern="1200" dirty="0">
+                <a:effectLst/>
+              </a:rPr>
+              <a:t>”</a:t>
+            </a:r>
+          </a:p>
+          <a:p>
+            <a:r>
+              <a:rPr lang="en-US" altLang="zh-CN" sz="1200" b="0" i="0" kern="1200" dirty="0" err="1">
+                <a:effectLst/>
+              </a:rPr>
+              <a:t>verbalized_needs_observation</a:t>
+            </a:r>
+            <a:r>
+              <a:rPr lang="zh-CN" altLang="en-US" sz="1200" b="0" i="0" kern="1200" dirty="0">
+                <a:effectLst/>
+              </a:rPr>
+              <a:t>     </a:t>
+            </a:r>
+            <a:r>
+              <a:rPr lang="en-US" altLang="zh-CN" sz="1200" b="0" i="0" kern="1200" dirty="0">
+                <a:effectLst/>
+              </a:rPr>
+              <a:t>1</a:t>
+            </a:r>
+            <a:r>
+              <a:rPr lang="zh-CN" altLang="en-US" sz="1200" b="0" i="0" kern="1200">
+                <a:effectLst/>
+              </a:rPr>
+              <a:t>             但</a:t>
+            </a:r>
+            <a:r>
+              <a:rPr lang="zh-CN" altLang="en-US" sz="1200" b="0" i="0" kern="1200" dirty="0">
+                <a:effectLst/>
+              </a:rPr>
+              <a:t>模型自己也说</a:t>
+            </a:r>
+            <a:r>
+              <a:rPr lang="en-US" altLang="zh-CN" sz="1200" b="0" i="0" kern="1200" dirty="0">
+                <a:effectLst/>
+              </a:rPr>
+              <a:t>"</a:t>
+            </a:r>
+            <a:r>
+              <a:rPr lang="zh-CN" altLang="en-US" sz="1200" b="0" i="0" kern="1200" dirty="0">
+                <a:effectLst/>
+              </a:rPr>
+              <a:t>我想再看一眼</a:t>
+            </a:r>
+            <a:r>
+              <a:rPr lang="en-US" altLang="zh-CN" sz="1200" b="0" i="0" kern="1200" dirty="0">
+                <a:effectLst/>
+              </a:rPr>
+              <a:t>"</a:t>
+            </a:r>
+          </a:p>
+          <a:p>
+            <a:r>
+              <a:rPr lang="zh-CN" altLang="en-US" sz="1200" b="1" i="0" kern="1200" dirty="0">
+                <a:effectLst/>
+              </a:rPr>
+              <a:t>门控输出</a:t>
+            </a:r>
+            <a:r>
+              <a:rPr lang="en-US" altLang="zh-CN" sz="1200" b="0" i="0" kern="1200" dirty="0">
+                <a:effectLst/>
+              </a:rPr>
+              <a:t>:</a:t>
+            </a:r>
+            <a:r>
+              <a:rPr lang="zh-CN" altLang="en-US" sz="1200" b="0" i="0" kern="1200" dirty="0">
+                <a:effectLst/>
+              </a:rPr>
+              <a:t>把这 </a:t>
+            </a:r>
+            <a:r>
+              <a:rPr lang="en-US" altLang="zh-CN" sz="1200" b="0" i="0" kern="1200" dirty="0">
+                <a:effectLst/>
+              </a:rPr>
+              <a:t>15 </a:t>
+            </a:r>
+            <a:r>
+              <a:rPr lang="zh-CN" altLang="en-US" sz="1200" b="0" i="0" kern="1200" dirty="0">
+                <a:effectLst/>
+              </a:rPr>
+              <a:t>个数和学到的权重做加权求和→</a:t>
+            </a:r>
+            <a:r>
+              <a:rPr lang="en-US" altLang="zh-CN" sz="1200" b="0" i="0" kern="1200" dirty="0">
+                <a:effectLst/>
+              </a:rPr>
+              <a:t>sigmoid→</a:t>
+            </a:r>
+            <a:r>
+              <a:rPr lang="zh-CN" altLang="en-US" sz="1200" b="0" i="0" kern="1200" dirty="0">
+                <a:effectLst/>
+              </a:rPr>
+              <a:t>得到一个</a:t>
+            </a:r>
+            <a:r>
+              <a:rPr lang="en-US" altLang="zh-CN" sz="1200" b="0" i="0" kern="1200" dirty="0">
+                <a:effectLst/>
+              </a:rPr>
+              <a:t>"</a:t>
+            </a:r>
+            <a:r>
+              <a:rPr lang="zh-CN" altLang="en-US" sz="1200" b="0" i="0" kern="1200" dirty="0">
+                <a:effectLst/>
+              </a:rPr>
+              <a:t>该观察的概率</a:t>
+            </a:r>
+            <a:r>
+              <a:rPr lang="en-US" altLang="zh-CN" sz="1200" b="0" i="0" kern="1200" dirty="0">
+                <a:effectLst/>
+              </a:rPr>
+              <a:t>",≥</a:t>
+            </a:r>
+            <a:r>
+              <a:rPr lang="zh-CN" altLang="en-US" sz="1200" b="0" i="0" kern="1200" dirty="0">
+                <a:effectLst/>
+              </a:rPr>
+              <a:t>阈值就观察。</a:t>
+            </a:r>
+          </a:p>
+          <a:p>
+            <a:endParaRPr sz="1100" dirty="0">
+              <a:solidFill>
+                <a:srgbClr val="94A3B8"/>
+              </a:solidFill>
+            </a:endParaRPr>
           </a:p>
         </p:txBody>
       </p:sp>
@@ -21222,16 +22775,21 @@
               </a:defRPr>
             </a:pPr>
             <a:r>
-              <a:rPr sz="825" b="1">
-                <a:solidFill>
-                  <a:srgbClr val="102A43"/>
-                </a:solidFill>
-                <a:latin typeface="Nunito Sans"/>
-                <a:ea typeface="Nunito Sans"/>
-                <a:cs typeface="Nunito Sans"/>
-              </a:rPr>
+              <a:rPr lang="en-US" altLang="zh-CN" sz="825" b="1" dirty="0" err="1"/>
               <a:t>next_action_type</a:t>
             </a:r>
+            <a:r>
+              <a:rPr lang="en-US" altLang="zh-CN" sz="825" b="1" dirty="0"/>
+              <a:t> ×4</a:t>
+            </a:r>
+            <a:endParaRPr sz="825" b="1" dirty="0">
+              <a:solidFill>
+                <a:srgbClr val="102A43"/>
+              </a:solidFill>
+              <a:latin typeface="Nunito Sans"/>
+              <a:ea typeface="Nunito Sans"/>
+              <a:cs typeface="Nunito Sans"/>
+            </a:endParaRPr>
           </a:p>
         </p:txBody>
       </p:sp>
@@ -21328,7 +22886,7 @@
               </a:defRPr>
             </a:pPr>
             <a:r>
-              <a:rPr sz="825" b="1">
+              <a:rPr lang="en-US" sz="825" b="1" dirty="0">
                 <a:solidFill>
                   <a:srgbClr val="102A43"/>
                 </a:solidFill>
@@ -21336,8 +22894,16 @@
                 <a:ea typeface="Nunito Sans"/>
                 <a:cs typeface="Nunito Sans"/>
               </a:rPr>
-              <a:t>risk flags</a:t>
-            </a:r>
+              <a:t>risk flags ×3</a:t>
+            </a:r>
+            <a:endParaRPr sz="825" b="1" dirty="0">
+              <a:solidFill>
+                <a:srgbClr val="102A43"/>
+              </a:solidFill>
+              <a:latin typeface="Nunito Sans"/>
+              <a:ea typeface="Nunito Sans"/>
+              <a:cs typeface="Nunito Sans"/>
+            </a:endParaRPr>
           </a:p>
         </p:txBody>
       </p:sp>

--- a/docs/Selective-Observation-Final-v3  -  Repaired.pptx
+++ b/docs/Selective-Observation-Final-v3  -  Repaired.pptx
@@ -1160,20 +1160,166 @@
           <a:lstStyle/>
           <a:p>
             <a:r>
+              <a:rPr sz="1200" dirty="0"/>
+              <a:t>[~45s] The core idea: add a lightweight gate before each action. The gate uses cheap signals available before observing — screen change flag, candidate changes, plan age, model confidence — and outputs a probability that observation is needed. If the score exceeds threshold T, we observe: one LLM call, fresh DOM, re-plan. If below T, we coast: zero calls, reuse the carried plan</a:t>
+            </a:r>
+            <a:r>
               <a:rPr sz="1200"/>
-              <a:t>[~45s] The core idea: add a lightweight gate before each action. The gate uses cheap signals available before observing — screen change flag, candidate changes, plan age, model confidence — and outputs a probability that observation is needed. If the score exceeds threshold T, we observe: one LLM call, fresh DOM, re-plan. If below T, we coast: zero calls, reuse the carried plan. There is a hard safety floor: we always observe before irreversible actions like submitting forms or sending email, regardless of gate score. This floor is the safety guarantee.</a:t>
-            </a:r>
-          </a:p>
-          <a:p>
-            <a:r>
-              <a:rPr sz="1100">
+              <a:t>. </a:t>
+            </a:r>
+            <a:r>
+              <a:rPr sz="1100" dirty="0">
                 <a:solidFill>
                   <a:srgbClr val="94A3B8"/>
                 </a:solidFill>
               </a:rPr>
               <a:t>
-【中文参考翻译】
-核心思路是在每个动作前加一个轻量级门控。门控使用观察前就能获得的廉价信号——屏幕变化标志、候选元素变化、计划年龄、模型置信度——输出一个概率表示是否需要观察。如果分数超过阈值 T，我们观察：一次 LLM 调用，获取新鲜 DOM，重新规划。如果低于 T，我们 coast：零调用，沿用当前计划。有一个硬安全底线：无论门控分数如何，在不可逆操作（如提交表单或发送邮件）前，我们始终观察。这个底线给了我们安全保障。</a:t>
+【</a:t>
+            </a:r>
+            <a:r>
+              <a:rPr sz="1100" dirty="0" err="1">
+                <a:solidFill>
+                  <a:srgbClr val="94A3B8"/>
+                </a:solidFill>
+              </a:rPr>
+              <a:t>中文参考翻译</a:t>
+            </a:r>
+            <a:r>
+              <a:rPr sz="1100" dirty="0">
+                <a:solidFill>
+                  <a:srgbClr val="94A3B8"/>
+                </a:solidFill>
+              </a:rPr>
+              <a:t>】
+</a:t>
+            </a:r>
+            <a:r>
+              <a:rPr sz="1100" dirty="0" err="1">
+                <a:solidFill>
+                  <a:srgbClr val="94A3B8"/>
+                </a:solidFill>
+              </a:rPr>
+              <a:t>核心思路是在每个动作前加一个轻量级门控。门控使用观察前就能获得的廉价信号</a:t>
+            </a:r>
+            <a:r>
+              <a:rPr sz="1100" dirty="0">
+                <a:solidFill>
+                  <a:srgbClr val="94A3B8"/>
+                </a:solidFill>
+              </a:rPr>
+              <a:t>——</a:t>
+            </a:r>
+            <a:r>
+              <a:rPr sz="1100" dirty="0" err="1">
+                <a:solidFill>
+                  <a:srgbClr val="94A3B8"/>
+                </a:solidFill>
+              </a:rPr>
+              <a:t>屏幕变化标志、候选元素变化、计划年龄、模型置信度</a:t>
+            </a:r>
+            <a:r>
+              <a:rPr sz="1100" dirty="0">
+                <a:solidFill>
+                  <a:srgbClr val="94A3B8"/>
+                </a:solidFill>
+              </a:rPr>
+              <a:t>——</a:t>
+            </a:r>
+            <a:r>
+              <a:rPr sz="1100" dirty="0" err="1">
+                <a:solidFill>
+                  <a:srgbClr val="94A3B8"/>
+                </a:solidFill>
+              </a:rPr>
+              <a:t>输出一个概率表示是否需要观察。如果分数超过阈值</a:t>
+            </a:r>
+            <a:r>
+              <a:rPr sz="1100" dirty="0">
+                <a:solidFill>
+                  <a:srgbClr val="94A3B8"/>
+                </a:solidFill>
+              </a:rPr>
+              <a:t> </a:t>
+            </a:r>
+            <a:r>
+              <a:rPr sz="1100" dirty="0" err="1">
+                <a:solidFill>
+                  <a:srgbClr val="94A3B8"/>
+                </a:solidFill>
+              </a:rPr>
+              <a:t>T，我们观察：一次</a:t>
+            </a:r>
+            <a:r>
+              <a:rPr sz="1100" dirty="0">
+                <a:solidFill>
+                  <a:srgbClr val="94A3B8"/>
+                </a:solidFill>
+              </a:rPr>
+              <a:t> LLM </a:t>
+            </a:r>
+            <a:r>
+              <a:rPr sz="1100" dirty="0" err="1">
+                <a:solidFill>
+                  <a:srgbClr val="94A3B8"/>
+                </a:solidFill>
+              </a:rPr>
+              <a:t>调用，获取新鲜</a:t>
+            </a:r>
+            <a:r>
+              <a:rPr sz="1100" dirty="0">
+                <a:solidFill>
+                  <a:srgbClr val="94A3B8"/>
+                </a:solidFill>
+              </a:rPr>
+              <a:t> </a:t>
+            </a:r>
+            <a:r>
+              <a:rPr sz="1100" dirty="0" err="1">
+                <a:solidFill>
+                  <a:srgbClr val="94A3B8"/>
+                </a:solidFill>
+              </a:rPr>
+              <a:t>DOM，重新规划。如果低于</a:t>
+            </a:r>
+            <a:r>
+              <a:rPr sz="1100" dirty="0">
+                <a:solidFill>
+                  <a:srgbClr val="94A3B8"/>
+                </a:solidFill>
+              </a:rPr>
+              <a:t> </a:t>
+            </a:r>
+            <a:r>
+              <a:rPr sz="1100" dirty="0" err="1">
+                <a:solidFill>
+                  <a:srgbClr val="94A3B8"/>
+                </a:solidFill>
+              </a:rPr>
+              <a:t>T，我们</a:t>
+            </a:r>
+            <a:r>
+              <a:rPr sz="1100" dirty="0">
+                <a:solidFill>
+                  <a:srgbClr val="94A3B8"/>
+                </a:solidFill>
+              </a:rPr>
+              <a:t> </a:t>
+            </a:r>
+            <a:r>
+              <a:rPr sz="1100" dirty="0" err="1">
+                <a:solidFill>
+                  <a:srgbClr val="94A3B8"/>
+                </a:solidFill>
+              </a:rPr>
+              <a:t>coast：零调用，沿用当前计划</a:t>
+            </a:r>
+            <a:r>
+              <a:rPr sz="1100" dirty="0">
+                <a:solidFill>
+                  <a:srgbClr val="94A3B8"/>
+                </a:solidFill>
+              </a:rPr>
+              <a:t>。</a:t>
             </a:r>
           </a:p>
         </p:txBody>
@@ -3934,7 +4080,7 @@
         </p:nvSpPr>
         <p:spPr>
           <a:xfrm>
-            <a:off x="590550" y="5782541"/>
+            <a:off x="590550" y="4752975"/>
             <a:ext cx="5143500" cy="209550"/>
           </a:xfrm>
           <a:prstGeom prst="rect">
@@ -5088,80 +5234,6 @@
           </a:p>
         </p:txBody>
       </p:sp>
-      <p:pic>
-        <p:nvPicPr>
-          <p:cNvPr id="28" name="Headshot Zejun Huang">
-            <a:extLst>
-              <a:ext uri="{FF2B5EF4-FFF2-40B4-BE49-F238E27FC236}">
-                <a16:creationId xmlns:a16="http://schemas.microsoft.com/office/drawing/2014/main" id="{5E6EE509-29A6-C930-7FB7-5199E532A549}"/>
-              </a:ext>
-            </a:extLst>
-          </p:cNvPr>
-          <p:cNvPicPr>
-            <a:picLocks noChangeAspect="1"/>
-          </p:cNvPicPr>
-          <p:nvPr/>
-        </p:nvPicPr>
-        <p:blipFill>
-          <a:blip r:embed="rId3"/>
-          <a:stretch>
-            <a:fillRect/>
-          </a:stretch>
-        </p:blipFill>
-        <p:spPr>
-          <a:xfrm>
-            <a:off x="625186" y="4700700"/>
-            <a:ext cx="675000" cy="900000"/>
-          </a:xfrm>
-          <a:prstGeom prst="roundRect">
-            <a:avLst>
-              <a:gd name="adj" fmla="val 7000"/>
-            </a:avLst>
-          </a:prstGeom>
-          <a:ln w="12700">
-            <a:solidFill>
-              <a:srgbClr val="FFFFFF"/>
-            </a:solidFill>
-          </a:ln>
-        </p:spPr>
-      </p:pic>
-      <p:pic>
-        <p:nvPicPr>
-          <p:cNvPr id="29" name="Headshot Dingjiang Liang">
-            <a:extLst>
-              <a:ext uri="{FF2B5EF4-FFF2-40B4-BE49-F238E27FC236}">
-                <a16:creationId xmlns:a16="http://schemas.microsoft.com/office/drawing/2014/main" id="{1BB01BF5-05E9-D685-EFE8-877C8536E8F3}"/>
-              </a:ext>
-            </a:extLst>
-          </p:cNvPr>
-          <p:cNvPicPr>
-            <a:picLocks noChangeAspect="1"/>
-          </p:cNvPicPr>
-          <p:nvPr/>
-        </p:nvPicPr>
-        <p:blipFill>
-          <a:blip r:embed="rId4"/>
-          <a:stretch>
-            <a:fillRect/>
-          </a:stretch>
-        </p:blipFill>
-        <p:spPr>
-          <a:xfrm>
-            <a:off x="1530186" y="4700700"/>
-            <a:ext cx="641969" cy="900000"/>
-          </a:xfrm>
-          <a:prstGeom prst="roundRect">
-            <a:avLst>
-              <a:gd name="adj" fmla="val 7000"/>
-            </a:avLst>
-          </a:prstGeom>
-          <a:ln w="12700">
-            <a:solidFill>
-              <a:srgbClr val="FFFFFF"/>
-            </a:solidFill>
-          </a:ln>
-        </p:spPr>
-      </p:pic>
     </p:spTree>
     <p:extLst>
       <p:ext uri="{BB962C8B-B14F-4D97-AF65-F5344CB8AC3E}">
